--- a/assets/presentation.pptx
+++ b/assets/presentation.pptx
@@ -31,7 +31,7 @@
     <p:sldId id="270" r:id="rId19"/>
   </p:sldIdLst>
   <p:sldSz cx="9144000" cy="6858000" type="screen4x3"/>
-  <p:notesSz cx="6858000" cy="9144000"/>
+  <p:notesSz cx="7102475" cy="9388475"/>
   <p:defaultTextStyle>
     <a:defPPr>
       <a:defRPr lang="en-US"/>
@@ -142,6 +142,9 @@
         </p15:guide>
       </p15:sldGuideLst>
     </p:ext>
+    <p:ext uri="{2D200454-40CA-4A62-9FC3-DE9A4176ACB9}">
+      <p15:notesGuideLst xmlns:p15="http://schemas.microsoft.com/office/powerpoint/2012/main"/>
+    </p:ext>
   </p:extLst>
 </p:presentation>
 </file>
@@ -186,15 +189,15 @@
         </p:nvSpPr>
         <p:spPr>
           <a:xfrm>
-            <a:off x="0" y="0"/>
-            <a:ext cx="2971800" cy="458788"/>
+            <a:off x="0" y="1"/>
+            <a:ext cx="3077739" cy="471054"/>
           </a:xfrm>
           <a:prstGeom prst="rect">
             <a:avLst/>
           </a:prstGeom>
         </p:spPr>
         <p:txBody>
-          <a:bodyPr vert="horz" lIns="91440" tIns="45720" rIns="91440" bIns="45720" rtlCol="0"/>
+          <a:bodyPr vert="horz" lIns="94229" tIns="47114" rIns="94229" bIns="47114" rtlCol="0"/>
           <a:lstStyle>
             <a:lvl1pPr algn="l">
               <a:defRPr sz="1200"/>
@@ -223,15 +226,15 @@
         </p:nvSpPr>
         <p:spPr>
           <a:xfrm>
-            <a:off x="3884613" y="0"/>
-            <a:ext cx="2971800" cy="458788"/>
+            <a:off x="4023092" y="1"/>
+            <a:ext cx="3077739" cy="471054"/>
           </a:xfrm>
           <a:prstGeom prst="rect">
             <a:avLst/>
           </a:prstGeom>
         </p:spPr>
         <p:txBody>
-          <a:bodyPr vert="horz" lIns="91440" tIns="45720" rIns="91440" bIns="45720" rtlCol="0"/>
+          <a:bodyPr vert="horz" lIns="94229" tIns="47114" rIns="94229" bIns="47114" rtlCol="0"/>
           <a:lstStyle>
             <a:lvl1pPr algn="r">
               <a:defRPr sz="1200"/>
@@ -240,7 +243,7 @@
           <a:p>
             <a:fld id="{AAA25C46-022F-4001-8419-8ED874343A44}" type="datetimeFigureOut">
               <a:rPr lang="en-CA" smtClean="0"/>
-              <a:t>2026-04-25</a:t>
+              <a:t>2026-05-21</a:t>
             </a:fld>
             <a:endParaRPr lang="en-CA"/>
           </a:p>
@@ -264,15 +267,15 @@
         </p:nvSpPr>
         <p:spPr>
           <a:xfrm>
-            <a:off x="0" y="8685213"/>
-            <a:ext cx="2971800" cy="458787"/>
+            <a:off x="0" y="8917422"/>
+            <a:ext cx="3077739" cy="471053"/>
           </a:xfrm>
           <a:prstGeom prst="rect">
             <a:avLst/>
           </a:prstGeom>
         </p:spPr>
         <p:txBody>
-          <a:bodyPr vert="horz" lIns="91440" tIns="45720" rIns="91440" bIns="45720" rtlCol="0" anchor="b"/>
+          <a:bodyPr vert="horz" lIns="94229" tIns="47114" rIns="94229" bIns="47114" rtlCol="0" anchor="b"/>
           <a:lstStyle>
             <a:lvl1pPr algn="l">
               <a:defRPr sz="1200"/>
@@ -301,15 +304,15 @@
         </p:nvSpPr>
         <p:spPr>
           <a:xfrm>
-            <a:off x="3884613" y="8685213"/>
-            <a:ext cx="2971800" cy="458787"/>
+            <a:off x="4023092" y="8917422"/>
+            <a:ext cx="3077739" cy="471053"/>
           </a:xfrm>
           <a:prstGeom prst="rect">
             <a:avLst/>
           </a:prstGeom>
         </p:spPr>
         <p:txBody>
-          <a:bodyPr vert="horz" lIns="91440" tIns="45720" rIns="91440" bIns="45720" rtlCol="0" anchor="b"/>
+          <a:bodyPr vert="horz" lIns="94229" tIns="47114" rIns="94229" bIns="47114" rtlCol="0" anchor="b"/>
           <a:lstStyle>
             <a:lvl1pPr algn="r">
               <a:defRPr sz="1200"/>
@@ -370,15 +373,15 @@
         </p:nvSpPr>
         <p:spPr>
           <a:xfrm>
-            <a:off x="0" y="0"/>
-            <a:ext cx="2971800" cy="458788"/>
+            <a:off x="0" y="1"/>
+            <a:ext cx="3077739" cy="471054"/>
           </a:xfrm>
           <a:prstGeom prst="rect">
             <a:avLst/>
           </a:prstGeom>
         </p:spPr>
         <p:txBody>
-          <a:bodyPr vert="horz" lIns="91440" tIns="45720" rIns="91440" bIns="45720" rtlCol="0"/>
+          <a:bodyPr vert="horz" lIns="94229" tIns="47114" rIns="94229" bIns="47114" rtlCol="0"/>
           <a:lstStyle>
             <a:lvl1pPr algn="l">
               <a:defRPr sz="1200"/>
@@ -401,15 +404,15 @@
         </p:nvSpPr>
         <p:spPr>
           <a:xfrm>
-            <a:off x="3884613" y="0"/>
-            <a:ext cx="2971800" cy="458788"/>
+            <a:off x="4023092" y="1"/>
+            <a:ext cx="3077739" cy="471054"/>
           </a:xfrm>
           <a:prstGeom prst="rect">
             <a:avLst/>
           </a:prstGeom>
         </p:spPr>
         <p:txBody>
-          <a:bodyPr vert="horz" lIns="91440" tIns="45720" rIns="91440" bIns="45720" rtlCol="0"/>
+          <a:bodyPr vert="horz" lIns="94229" tIns="47114" rIns="94229" bIns="47114" rtlCol="0"/>
           <a:lstStyle>
             <a:lvl1pPr algn="r">
               <a:defRPr sz="1200"/>
@@ -418,7 +421,7 @@
           <a:p>
             <a:fld id="{B3223E7D-A42C-4DC7-AACE-65EDB91915A6}" type="datetimeFigureOut">
               <a:rPr lang="en-CA" smtClean="0"/>
-              <a:t>2026-04-25</a:t>
+              <a:t>2026-05-21</a:t>
             </a:fld>
             <a:endParaRPr lang="en-CA"/>
           </a:p>
@@ -436,8 +439,8 @@
         </p:nvSpPr>
         <p:spPr>
           <a:xfrm>
-            <a:off x="1371600" y="1143000"/>
-            <a:ext cx="4114800" cy="3086100"/>
+            <a:off x="1438275" y="1173163"/>
+            <a:ext cx="4225925" cy="3168650"/>
           </a:xfrm>
           <a:prstGeom prst="rect">
             <a:avLst/>
@@ -450,7 +453,7 @@
           </a:ln>
         </p:spPr>
         <p:txBody>
-          <a:bodyPr vert="horz" lIns="91440" tIns="45720" rIns="91440" bIns="45720" rtlCol="0" anchor="ctr"/>
+          <a:bodyPr vert="horz" lIns="94229" tIns="47114" rIns="94229" bIns="47114" rtlCol="0" anchor="ctr"/>
           <a:lstStyle/>
           <a:p>
             <a:endParaRPr lang="en-CA"/>
@@ -469,51 +472,51 @@
         </p:nvSpPr>
         <p:spPr>
           <a:xfrm>
-            <a:off x="685800" y="4400550"/>
-            <a:ext cx="5486400" cy="3600450"/>
+            <a:off x="710248" y="4518203"/>
+            <a:ext cx="5681980" cy="3696713"/>
           </a:xfrm>
           <a:prstGeom prst="rect">
             <a:avLst/>
           </a:prstGeom>
         </p:spPr>
         <p:txBody>
-          <a:bodyPr vert="horz" lIns="91440" tIns="45720" rIns="91440" bIns="45720" rtlCol="0"/>
+          <a:bodyPr vert="horz" lIns="94229" tIns="47114" rIns="94229" bIns="47114" rtlCol="0"/>
           <a:lstStyle/>
           <a:p>
             <a:pPr lvl="0"/>
             <a:r>
-              <a:rPr lang="en-US"/>
+              <a:rPr lang="en-US" dirty="0"/>
               <a:t>Click to edit Master text styles</a:t>
             </a:r>
           </a:p>
           <a:p>
             <a:pPr lvl="1"/>
             <a:r>
-              <a:rPr lang="en-US"/>
+              <a:rPr lang="en-US" dirty="0"/>
               <a:t>Second level</a:t>
             </a:r>
           </a:p>
           <a:p>
             <a:pPr lvl="2"/>
             <a:r>
-              <a:rPr lang="en-US"/>
+              <a:rPr lang="en-US" dirty="0"/>
               <a:t>Third level</a:t>
             </a:r>
           </a:p>
           <a:p>
             <a:pPr lvl="3"/>
             <a:r>
-              <a:rPr lang="en-US"/>
+              <a:rPr lang="en-US" dirty="0"/>
               <a:t>Fourth level</a:t>
             </a:r>
           </a:p>
           <a:p>
             <a:pPr lvl="4"/>
             <a:r>
-              <a:rPr lang="en-US"/>
+              <a:rPr lang="en-US" dirty="0"/>
               <a:t>Fifth level</a:t>
             </a:r>
-            <a:endParaRPr lang="en-CA"/>
+            <a:endParaRPr lang="en-CA" dirty="0"/>
           </a:p>
         </p:txBody>
       </p:sp>
@@ -529,15 +532,15 @@
         </p:nvSpPr>
         <p:spPr>
           <a:xfrm>
-            <a:off x="0" y="8685213"/>
-            <a:ext cx="2971800" cy="458787"/>
+            <a:off x="0" y="8917422"/>
+            <a:ext cx="3077739" cy="471053"/>
           </a:xfrm>
           <a:prstGeom prst="rect">
             <a:avLst/>
           </a:prstGeom>
         </p:spPr>
         <p:txBody>
-          <a:bodyPr vert="horz" lIns="91440" tIns="45720" rIns="91440" bIns="45720" rtlCol="0" anchor="b"/>
+          <a:bodyPr vert="horz" lIns="94229" tIns="47114" rIns="94229" bIns="47114" rtlCol="0" anchor="b"/>
           <a:lstStyle>
             <a:lvl1pPr algn="l">
               <a:defRPr sz="1200"/>
@@ -560,15 +563,15 @@
         </p:nvSpPr>
         <p:spPr>
           <a:xfrm>
-            <a:off x="3884613" y="8685213"/>
-            <a:ext cx="2971800" cy="458787"/>
+            <a:off x="4023092" y="8917422"/>
+            <a:ext cx="3077739" cy="471053"/>
           </a:xfrm>
           <a:prstGeom prst="rect">
             <a:avLst/>
           </a:prstGeom>
         </p:spPr>
         <p:txBody>
-          <a:bodyPr vert="horz" lIns="91440" tIns="45720" rIns="91440" bIns="45720" rtlCol="0" anchor="b"/>
+          <a:bodyPr vert="horz" lIns="94229" tIns="47114" rIns="94229" bIns="47114" rtlCol="0" anchor="b"/>
           <a:lstStyle>
             <a:lvl1pPr algn="r">
               <a:defRPr sz="1200"/>
@@ -594,7 +597,7 @@
   <p:hf hdr="0" ftr="0" dt="0"/>
   <p:notesStyle>
     <a:lvl1pPr marL="0" algn="l" defTabSz="914400" rtl="0" eaLnBrk="1" latinLnBrk="0" hangingPunct="1">
-      <a:defRPr sz="1200" kern="1200">
+      <a:defRPr sz="1400" kern="1200">
         <a:solidFill>
           <a:schemeClr val="tx1"/>
         </a:solidFill>
@@ -604,7 +607,7 @@
       </a:defRPr>
     </a:lvl1pPr>
     <a:lvl2pPr marL="457200" algn="l" defTabSz="914400" rtl="0" eaLnBrk="1" latinLnBrk="0" hangingPunct="1">
-      <a:defRPr sz="1200" kern="1200">
+      <a:defRPr sz="1400" kern="1200">
         <a:solidFill>
           <a:schemeClr val="tx1"/>
         </a:solidFill>
@@ -614,7 +617,7 @@
       </a:defRPr>
     </a:lvl2pPr>
     <a:lvl3pPr marL="914400" algn="l" defTabSz="914400" rtl="0" eaLnBrk="1" latinLnBrk="0" hangingPunct="1">
-      <a:defRPr sz="1200" kern="1200">
+      <a:defRPr sz="1400" kern="1200">
         <a:solidFill>
           <a:schemeClr val="tx1"/>
         </a:solidFill>
@@ -624,7 +627,7 @@
       </a:defRPr>
     </a:lvl3pPr>
     <a:lvl4pPr marL="1371600" algn="l" defTabSz="914400" rtl="0" eaLnBrk="1" latinLnBrk="0" hangingPunct="1">
-      <a:defRPr sz="1200" kern="1200">
+      <a:defRPr sz="1400" kern="1200">
         <a:solidFill>
           <a:schemeClr val="tx1"/>
         </a:solidFill>
@@ -634,7 +637,7 @@
       </a:defRPr>
     </a:lvl4pPr>
     <a:lvl5pPr marL="1828800" algn="l" defTabSz="914400" rtl="0" eaLnBrk="1" latinLnBrk="0" hangingPunct="1">
-      <a:defRPr sz="1200" kern="1200">
+      <a:defRPr sz="1400" kern="1200">
         <a:solidFill>
           <a:schemeClr val="tx1"/>
         </a:solidFill>
@@ -685,6 +688,1518 @@
     </a:lvl9pPr>
   </p:notesStyle>
 </p:notesMaster>
+</file>
+
+<file path=ppt/notesSlides/notesSlide1.xml><?xml version="1.0" encoding="utf-8"?>
+<p:notes xmlns:a="http://schemas.openxmlformats.org/drawingml/2006/main" xmlns:r="http://schemas.openxmlformats.org/officeDocument/2006/relationships" xmlns:p="http://schemas.openxmlformats.org/presentationml/2006/main">
+  <p:cSld>
+    <p:spTree>
+      <p:nvGrpSpPr>
+        <p:cNvPr id="1" name=""/>
+        <p:cNvGrpSpPr/>
+        <p:nvPr/>
+      </p:nvGrpSpPr>
+      <p:grpSpPr>
+        <a:xfrm>
+          <a:off x="0" y="0"/>
+          <a:ext cx="0" cy="0"/>
+          <a:chOff x="0" y="0"/>
+          <a:chExt cx="0" cy="0"/>
+        </a:xfrm>
+      </p:grpSpPr>
+      <p:sp>
+        <p:nvSpPr>
+          <p:cNvPr id="2" name="Slide Image Placeholder 1"/>
+          <p:cNvSpPr>
+            <a:spLocks noGrp="1" noRot="1" noChangeAspect="1"/>
+          </p:cNvSpPr>
+          <p:nvPr>
+            <p:ph type="sldImg"/>
+          </p:nvPr>
+        </p:nvSpPr>
+        <p:spPr/>
+      </p:sp>
+      <p:sp>
+        <p:nvSpPr>
+          <p:cNvPr id="3" name="Notes Placeholder 2"/>
+          <p:cNvSpPr>
+            <a:spLocks noGrp="1"/>
+          </p:cNvSpPr>
+          <p:nvPr>
+            <p:ph type="body" idx="1"/>
+          </p:nvPr>
+        </p:nvSpPr>
+        <p:spPr/>
+        <p:txBody>
+          <a:bodyPr/>
+          <a:lstStyle/>
+          <a:p>
+            <a:endParaRPr lang="en-CA"/>
+          </a:p>
+        </p:txBody>
+      </p:sp>
+      <p:sp>
+        <p:nvSpPr>
+          <p:cNvPr id="4" name="Slide Number Placeholder 3"/>
+          <p:cNvSpPr>
+            <a:spLocks noGrp="1"/>
+          </p:cNvSpPr>
+          <p:nvPr>
+            <p:ph type="sldNum" sz="quarter" idx="5"/>
+          </p:nvPr>
+        </p:nvSpPr>
+        <p:spPr/>
+        <p:txBody>
+          <a:bodyPr/>
+          <a:lstStyle/>
+          <a:p>
+            <a:fld id="{D8903771-1C21-4762-A26D-AD891561B33E}" type="slidenum">
+              <a:rPr lang="en-CA" smtClean="0"/>
+              <a:t>1</a:t>
+            </a:fld>
+            <a:endParaRPr lang="en-CA"/>
+          </a:p>
+        </p:txBody>
+      </p:sp>
+    </p:spTree>
+    <p:extLst>
+      <p:ext uri="{BB962C8B-B14F-4D97-AF65-F5344CB8AC3E}">
+        <p14:creationId xmlns:p14="http://schemas.microsoft.com/office/powerpoint/2010/main" val="2711866395"/>
+      </p:ext>
+    </p:extLst>
+  </p:cSld>
+  <p:clrMapOvr>
+    <a:masterClrMapping/>
+  </p:clrMapOvr>
+</p:notes>
+</file>
+
+<file path=ppt/notesSlides/notesSlide10.xml><?xml version="1.0" encoding="utf-8"?>
+<p:notes xmlns:a="http://schemas.openxmlformats.org/drawingml/2006/main" xmlns:r="http://schemas.openxmlformats.org/officeDocument/2006/relationships" xmlns:p="http://schemas.openxmlformats.org/presentationml/2006/main">
+  <p:cSld>
+    <p:spTree>
+      <p:nvGrpSpPr>
+        <p:cNvPr id="1" name=""/>
+        <p:cNvGrpSpPr/>
+        <p:nvPr/>
+      </p:nvGrpSpPr>
+      <p:grpSpPr>
+        <a:xfrm>
+          <a:off x="0" y="0"/>
+          <a:ext cx="0" cy="0"/>
+          <a:chOff x="0" y="0"/>
+          <a:chExt cx="0" cy="0"/>
+        </a:xfrm>
+      </p:grpSpPr>
+      <p:sp>
+        <p:nvSpPr>
+          <p:cNvPr id="2" name="Slide Image Placeholder 1"/>
+          <p:cNvSpPr>
+            <a:spLocks noGrp="1" noRot="1" noChangeAspect="1"/>
+          </p:cNvSpPr>
+          <p:nvPr>
+            <p:ph type="sldImg"/>
+          </p:nvPr>
+        </p:nvSpPr>
+        <p:spPr/>
+      </p:sp>
+      <p:sp>
+        <p:nvSpPr>
+          <p:cNvPr id="3" name="Notes Placeholder 2"/>
+          <p:cNvSpPr>
+            <a:spLocks noGrp="1"/>
+          </p:cNvSpPr>
+          <p:nvPr>
+            <p:ph type="body" idx="1"/>
+          </p:nvPr>
+        </p:nvSpPr>
+        <p:spPr/>
+        <p:txBody>
+          <a:bodyPr/>
+          <a:lstStyle/>
+          <a:p>
+            <a:endParaRPr lang="en-CA" dirty="0"/>
+          </a:p>
+        </p:txBody>
+      </p:sp>
+      <p:sp>
+        <p:nvSpPr>
+          <p:cNvPr id="4" name="Slide Number Placeholder 3"/>
+          <p:cNvSpPr>
+            <a:spLocks noGrp="1"/>
+          </p:cNvSpPr>
+          <p:nvPr>
+            <p:ph type="sldNum" sz="quarter" idx="5"/>
+          </p:nvPr>
+        </p:nvSpPr>
+        <p:spPr/>
+        <p:txBody>
+          <a:bodyPr/>
+          <a:lstStyle/>
+          <a:p>
+            <a:fld id="{D8903771-1C21-4762-A26D-AD891561B33E}" type="slidenum">
+              <a:rPr lang="en-CA" smtClean="0"/>
+              <a:t>10</a:t>
+            </a:fld>
+            <a:endParaRPr lang="en-CA"/>
+          </a:p>
+        </p:txBody>
+      </p:sp>
+    </p:spTree>
+    <p:extLst>
+      <p:ext uri="{BB962C8B-B14F-4D97-AF65-F5344CB8AC3E}">
+        <p14:creationId xmlns:p14="http://schemas.microsoft.com/office/powerpoint/2010/main" val="1622098777"/>
+      </p:ext>
+    </p:extLst>
+  </p:cSld>
+  <p:clrMapOvr>
+    <a:masterClrMapping/>
+  </p:clrMapOvr>
+</p:notes>
+</file>
+
+<file path=ppt/notesSlides/notesSlide11.xml><?xml version="1.0" encoding="utf-8"?>
+<p:notes xmlns:a="http://schemas.openxmlformats.org/drawingml/2006/main" xmlns:r="http://schemas.openxmlformats.org/officeDocument/2006/relationships" xmlns:p="http://schemas.openxmlformats.org/presentationml/2006/main">
+  <p:cSld>
+    <p:spTree>
+      <p:nvGrpSpPr>
+        <p:cNvPr id="1" name=""/>
+        <p:cNvGrpSpPr/>
+        <p:nvPr/>
+      </p:nvGrpSpPr>
+      <p:grpSpPr>
+        <a:xfrm>
+          <a:off x="0" y="0"/>
+          <a:ext cx="0" cy="0"/>
+          <a:chOff x="0" y="0"/>
+          <a:chExt cx="0" cy="0"/>
+        </a:xfrm>
+      </p:grpSpPr>
+      <p:sp>
+        <p:nvSpPr>
+          <p:cNvPr id="2" name="Slide Image Placeholder 1"/>
+          <p:cNvSpPr>
+            <a:spLocks noGrp="1" noRot="1" noChangeAspect="1"/>
+          </p:cNvSpPr>
+          <p:nvPr>
+            <p:ph type="sldImg"/>
+          </p:nvPr>
+        </p:nvSpPr>
+        <p:spPr/>
+      </p:sp>
+      <p:sp>
+        <p:nvSpPr>
+          <p:cNvPr id="3" name="Notes Placeholder 2"/>
+          <p:cNvSpPr>
+            <a:spLocks noGrp="1"/>
+          </p:cNvSpPr>
+          <p:nvPr>
+            <p:ph type="body" idx="1"/>
+          </p:nvPr>
+        </p:nvSpPr>
+        <p:spPr/>
+        <p:txBody>
+          <a:bodyPr/>
+          <a:lstStyle/>
+          <a:p>
+            <a:endParaRPr lang="en-CA" dirty="0"/>
+          </a:p>
+        </p:txBody>
+      </p:sp>
+      <p:sp>
+        <p:nvSpPr>
+          <p:cNvPr id="4" name="Slide Number Placeholder 3"/>
+          <p:cNvSpPr>
+            <a:spLocks noGrp="1"/>
+          </p:cNvSpPr>
+          <p:nvPr>
+            <p:ph type="sldNum" sz="quarter" idx="5"/>
+          </p:nvPr>
+        </p:nvSpPr>
+        <p:spPr/>
+        <p:txBody>
+          <a:bodyPr/>
+          <a:lstStyle/>
+          <a:p>
+            <a:fld id="{D8903771-1C21-4762-A26D-AD891561B33E}" type="slidenum">
+              <a:rPr lang="en-CA" smtClean="0"/>
+              <a:t>11</a:t>
+            </a:fld>
+            <a:endParaRPr lang="en-CA"/>
+          </a:p>
+        </p:txBody>
+      </p:sp>
+    </p:spTree>
+    <p:extLst>
+      <p:ext uri="{BB962C8B-B14F-4D97-AF65-F5344CB8AC3E}">
+        <p14:creationId xmlns:p14="http://schemas.microsoft.com/office/powerpoint/2010/main" val="3822303572"/>
+      </p:ext>
+    </p:extLst>
+  </p:cSld>
+  <p:clrMapOvr>
+    <a:masterClrMapping/>
+  </p:clrMapOvr>
+</p:notes>
+</file>
+
+<file path=ppt/notesSlides/notesSlide12.xml><?xml version="1.0" encoding="utf-8"?>
+<p:notes xmlns:a="http://schemas.openxmlformats.org/drawingml/2006/main" xmlns:r="http://schemas.openxmlformats.org/officeDocument/2006/relationships" xmlns:p="http://schemas.openxmlformats.org/presentationml/2006/main">
+  <p:cSld>
+    <p:spTree>
+      <p:nvGrpSpPr>
+        <p:cNvPr id="1" name=""/>
+        <p:cNvGrpSpPr/>
+        <p:nvPr/>
+      </p:nvGrpSpPr>
+      <p:grpSpPr>
+        <a:xfrm>
+          <a:off x="0" y="0"/>
+          <a:ext cx="0" cy="0"/>
+          <a:chOff x="0" y="0"/>
+          <a:chExt cx="0" cy="0"/>
+        </a:xfrm>
+      </p:grpSpPr>
+      <p:sp>
+        <p:nvSpPr>
+          <p:cNvPr id="2" name="Slide Image Placeholder 1"/>
+          <p:cNvSpPr>
+            <a:spLocks noGrp="1" noRot="1" noChangeAspect="1"/>
+          </p:cNvSpPr>
+          <p:nvPr>
+            <p:ph type="sldImg"/>
+          </p:nvPr>
+        </p:nvSpPr>
+        <p:spPr/>
+      </p:sp>
+      <p:sp>
+        <p:nvSpPr>
+          <p:cNvPr id="3" name="Notes Placeholder 2"/>
+          <p:cNvSpPr>
+            <a:spLocks noGrp="1"/>
+          </p:cNvSpPr>
+          <p:nvPr>
+            <p:ph type="body" idx="1"/>
+          </p:nvPr>
+        </p:nvSpPr>
+        <p:spPr/>
+        <p:txBody>
+          <a:bodyPr/>
+          <a:lstStyle/>
+          <a:p>
+            <a:endParaRPr lang="en-CA"/>
+          </a:p>
+        </p:txBody>
+      </p:sp>
+      <p:sp>
+        <p:nvSpPr>
+          <p:cNvPr id="4" name="Slide Number Placeholder 3"/>
+          <p:cNvSpPr>
+            <a:spLocks noGrp="1"/>
+          </p:cNvSpPr>
+          <p:nvPr>
+            <p:ph type="sldNum" sz="quarter" idx="5"/>
+          </p:nvPr>
+        </p:nvSpPr>
+        <p:spPr/>
+        <p:txBody>
+          <a:bodyPr/>
+          <a:lstStyle/>
+          <a:p>
+            <a:fld id="{D8903771-1C21-4762-A26D-AD891561B33E}" type="slidenum">
+              <a:rPr lang="en-CA" smtClean="0"/>
+              <a:t>12</a:t>
+            </a:fld>
+            <a:endParaRPr lang="en-CA"/>
+          </a:p>
+        </p:txBody>
+      </p:sp>
+    </p:spTree>
+    <p:extLst>
+      <p:ext uri="{BB962C8B-B14F-4D97-AF65-F5344CB8AC3E}">
+        <p14:creationId xmlns:p14="http://schemas.microsoft.com/office/powerpoint/2010/main" val="3019537987"/>
+      </p:ext>
+    </p:extLst>
+  </p:cSld>
+  <p:clrMapOvr>
+    <a:masterClrMapping/>
+  </p:clrMapOvr>
+</p:notes>
+</file>
+
+<file path=ppt/notesSlides/notesSlide13.xml><?xml version="1.0" encoding="utf-8"?>
+<p:notes xmlns:a="http://schemas.openxmlformats.org/drawingml/2006/main" xmlns:r="http://schemas.openxmlformats.org/officeDocument/2006/relationships" xmlns:p="http://schemas.openxmlformats.org/presentationml/2006/main">
+  <p:cSld>
+    <p:spTree>
+      <p:nvGrpSpPr>
+        <p:cNvPr id="1" name=""/>
+        <p:cNvGrpSpPr/>
+        <p:nvPr/>
+      </p:nvGrpSpPr>
+      <p:grpSpPr>
+        <a:xfrm>
+          <a:off x="0" y="0"/>
+          <a:ext cx="0" cy="0"/>
+          <a:chOff x="0" y="0"/>
+          <a:chExt cx="0" cy="0"/>
+        </a:xfrm>
+      </p:grpSpPr>
+      <p:sp>
+        <p:nvSpPr>
+          <p:cNvPr id="2" name="Slide Image Placeholder 1"/>
+          <p:cNvSpPr>
+            <a:spLocks noGrp="1" noRot="1" noChangeAspect="1"/>
+          </p:cNvSpPr>
+          <p:nvPr>
+            <p:ph type="sldImg"/>
+          </p:nvPr>
+        </p:nvSpPr>
+        <p:spPr/>
+      </p:sp>
+      <p:sp>
+        <p:nvSpPr>
+          <p:cNvPr id="3" name="Notes Placeholder 2"/>
+          <p:cNvSpPr>
+            <a:spLocks noGrp="1"/>
+          </p:cNvSpPr>
+          <p:nvPr>
+            <p:ph type="body" idx="1"/>
+          </p:nvPr>
+        </p:nvSpPr>
+        <p:spPr/>
+        <p:txBody>
+          <a:bodyPr/>
+          <a:lstStyle/>
+          <a:p>
+            <a:endParaRPr lang="en-CA"/>
+          </a:p>
+        </p:txBody>
+      </p:sp>
+      <p:sp>
+        <p:nvSpPr>
+          <p:cNvPr id="4" name="Slide Number Placeholder 3"/>
+          <p:cNvSpPr>
+            <a:spLocks noGrp="1"/>
+          </p:cNvSpPr>
+          <p:nvPr>
+            <p:ph type="sldNum" sz="quarter" idx="5"/>
+          </p:nvPr>
+        </p:nvSpPr>
+        <p:spPr/>
+        <p:txBody>
+          <a:bodyPr/>
+          <a:lstStyle/>
+          <a:p>
+            <a:fld id="{D8903771-1C21-4762-A26D-AD891561B33E}" type="slidenum">
+              <a:rPr lang="en-CA" smtClean="0"/>
+              <a:t>13</a:t>
+            </a:fld>
+            <a:endParaRPr lang="en-CA"/>
+          </a:p>
+        </p:txBody>
+      </p:sp>
+    </p:spTree>
+    <p:extLst>
+      <p:ext uri="{BB962C8B-B14F-4D97-AF65-F5344CB8AC3E}">
+        <p14:creationId xmlns:p14="http://schemas.microsoft.com/office/powerpoint/2010/main" val="3010185723"/>
+      </p:ext>
+    </p:extLst>
+  </p:cSld>
+  <p:clrMapOvr>
+    <a:masterClrMapping/>
+  </p:clrMapOvr>
+</p:notes>
+</file>
+
+<file path=ppt/notesSlides/notesSlide14.xml><?xml version="1.0" encoding="utf-8"?>
+<p:notes xmlns:a="http://schemas.openxmlformats.org/drawingml/2006/main" xmlns:r="http://schemas.openxmlformats.org/officeDocument/2006/relationships" xmlns:p="http://schemas.openxmlformats.org/presentationml/2006/main">
+  <p:cSld>
+    <p:spTree>
+      <p:nvGrpSpPr>
+        <p:cNvPr id="1" name=""/>
+        <p:cNvGrpSpPr/>
+        <p:nvPr/>
+      </p:nvGrpSpPr>
+      <p:grpSpPr>
+        <a:xfrm>
+          <a:off x="0" y="0"/>
+          <a:ext cx="0" cy="0"/>
+          <a:chOff x="0" y="0"/>
+          <a:chExt cx="0" cy="0"/>
+        </a:xfrm>
+      </p:grpSpPr>
+      <p:sp>
+        <p:nvSpPr>
+          <p:cNvPr id="2" name="Slide Image Placeholder 1"/>
+          <p:cNvSpPr>
+            <a:spLocks noGrp="1" noRot="1" noChangeAspect="1"/>
+          </p:cNvSpPr>
+          <p:nvPr>
+            <p:ph type="sldImg"/>
+          </p:nvPr>
+        </p:nvSpPr>
+        <p:spPr/>
+      </p:sp>
+      <p:sp>
+        <p:nvSpPr>
+          <p:cNvPr id="3" name="Notes Placeholder 2"/>
+          <p:cNvSpPr>
+            <a:spLocks noGrp="1"/>
+          </p:cNvSpPr>
+          <p:nvPr>
+            <p:ph type="body" idx="1"/>
+          </p:nvPr>
+        </p:nvSpPr>
+        <p:spPr/>
+        <p:txBody>
+          <a:bodyPr/>
+          <a:lstStyle/>
+          <a:p>
+            <a:endParaRPr lang="en-CA"/>
+          </a:p>
+        </p:txBody>
+      </p:sp>
+      <p:sp>
+        <p:nvSpPr>
+          <p:cNvPr id="4" name="Slide Number Placeholder 3"/>
+          <p:cNvSpPr>
+            <a:spLocks noGrp="1"/>
+          </p:cNvSpPr>
+          <p:nvPr>
+            <p:ph type="sldNum" sz="quarter" idx="5"/>
+          </p:nvPr>
+        </p:nvSpPr>
+        <p:spPr/>
+        <p:txBody>
+          <a:bodyPr/>
+          <a:lstStyle/>
+          <a:p>
+            <a:fld id="{D8903771-1C21-4762-A26D-AD891561B33E}" type="slidenum">
+              <a:rPr lang="en-CA" smtClean="0"/>
+              <a:t>14</a:t>
+            </a:fld>
+            <a:endParaRPr lang="en-CA"/>
+          </a:p>
+        </p:txBody>
+      </p:sp>
+    </p:spTree>
+    <p:extLst>
+      <p:ext uri="{BB962C8B-B14F-4D97-AF65-F5344CB8AC3E}">
+        <p14:creationId xmlns:p14="http://schemas.microsoft.com/office/powerpoint/2010/main" val="1394870378"/>
+      </p:ext>
+    </p:extLst>
+  </p:cSld>
+  <p:clrMapOvr>
+    <a:masterClrMapping/>
+  </p:clrMapOvr>
+</p:notes>
+</file>
+
+<file path=ppt/notesSlides/notesSlide15.xml><?xml version="1.0" encoding="utf-8"?>
+<p:notes xmlns:a="http://schemas.openxmlformats.org/drawingml/2006/main" xmlns:r="http://schemas.openxmlformats.org/officeDocument/2006/relationships" xmlns:p="http://schemas.openxmlformats.org/presentationml/2006/main">
+  <p:cSld>
+    <p:spTree>
+      <p:nvGrpSpPr>
+        <p:cNvPr id="1" name=""/>
+        <p:cNvGrpSpPr/>
+        <p:nvPr/>
+      </p:nvGrpSpPr>
+      <p:grpSpPr>
+        <a:xfrm>
+          <a:off x="0" y="0"/>
+          <a:ext cx="0" cy="0"/>
+          <a:chOff x="0" y="0"/>
+          <a:chExt cx="0" cy="0"/>
+        </a:xfrm>
+      </p:grpSpPr>
+      <p:sp>
+        <p:nvSpPr>
+          <p:cNvPr id="2" name="Slide Image Placeholder 1"/>
+          <p:cNvSpPr>
+            <a:spLocks noGrp="1" noRot="1" noChangeAspect="1"/>
+          </p:cNvSpPr>
+          <p:nvPr>
+            <p:ph type="sldImg"/>
+          </p:nvPr>
+        </p:nvSpPr>
+        <p:spPr/>
+      </p:sp>
+      <p:sp>
+        <p:nvSpPr>
+          <p:cNvPr id="3" name="Notes Placeholder 2"/>
+          <p:cNvSpPr>
+            <a:spLocks noGrp="1"/>
+          </p:cNvSpPr>
+          <p:nvPr>
+            <p:ph type="body" idx="1"/>
+          </p:nvPr>
+        </p:nvSpPr>
+        <p:spPr/>
+        <p:txBody>
+          <a:bodyPr/>
+          <a:lstStyle/>
+          <a:p>
+            <a:endParaRPr lang="en-CA"/>
+          </a:p>
+        </p:txBody>
+      </p:sp>
+      <p:sp>
+        <p:nvSpPr>
+          <p:cNvPr id="4" name="Slide Number Placeholder 3"/>
+          <p:cNvSpPr>
+            <a:spLocks noGrp="1"/>
+          </p:cNvSpPr>
+          <p:nvPr>
+            <p:ph type="sldNum" sz="quarter" idx="5"/>
+          </p:nvPr>
+        </p:nvSpPr>
+        <p:spPr/>
+        <p:txBody>
+          <a:bodyPr/>
+          <a:lstStyle/>
+          <a:p>
+            <a:fld id="{D8903771-1C21-4762-A26D-AD891561B33E}" type="slidenum">
+              <a:rPr lang="en-CA" smtClean="0"/>
+              <a:t>15</a:t>
+            </a:fld>
+            <a:endParaRPr lang="en-CA"/>
+          </a:p>
+        </p:txBody>
+      </p:sp>
+    </p:spTree>
+    <p:extLst>
+      <p:ext uri="{BB962C8B-B14F-4D97-AF65-F5344CB8AC3E}">
+        <p14:creationId xmlns:p14="http://schemas.microsoft.com/office/powerpoint/2010/main" val="1192669215"/>
+      </p:ext>
+    </p:extLst>
+  </p:cSld>
+  <p:clrMapOvr>
+    <a:masterClrMapping/>
+  </p:clrMapOvr>
+</p:notes>
+</file>
+
+<file path=ppt/notesSlides/notesSlide16.xml><?xml version="1.0" encoding="utf-8"?>
+<p:notes xmlns:a="http://schemas.openxmlformats.org/drawingml/2006/main" xmlns:r="http://schemas.openxmlformats.org/officeDocument/2006/relationships" xmlns:p="http://schemas.openxmlformats.org/presentationml/2006/main">
+  <p:cSld>
+    <p:spTree>
+      <p:nvGrpSpPr>
+        <p:cNvPr id="1" name=""/>
+        <p:cNvGrpSpPr/>
+        <p:nvPr/>
+      </p:nvGrpSpPr>
+      <p:grpSpPr>
+        <a:xfrm>
+          <a:off x="0" y="0"/>
+          <a:ext cx="0" cy="0"/>
+          <a:chOff x="0" y="0"/>
+          <a:chExt cx="0" cy="0"/>
+        </a:xfrm>
+      </p:grpSpPr>
+      <p:sp>
+        <p:nvSpPr>
+          <p:cNvPr id="2" name="Slide Image Placeholder 1"/>
+          <p:cNvSpPr>
+            <a:spLocks noGrp="1" noRot="1" noChangeAspect="1"/>
+          </p:cNvSpPr>
+          <p:nvPr>
+            <p:ph type="sldImg"/>
+          </p:nvPr>
+        </p:nvSpPr>
+        <p:spPr/>
+      </p:sp>
+      <p:sp>
+        <p:nvSpPr>
+          <p:cNvPr id="3" name="Notes Placeholder 2"/>
+          <p:cNvSpPr>
+            <a:spLocks noGrp="1"/>
+          </p:cNvSpPr>
+          <p:nvPr>
+            <p:ph type="body" idx="1"/>
+          </p:nvPr>
+        </p:nvSpPr>
+        <p:spPr/>
+        <p:txBody>
+          <a:bodyPr/>
+          <a:lstStyle/>
+          <a:p>
+            <a:endParaRPr lang="en-CA"/>
+          </a:p>
+        </p:txBody>
+      </p:sp>
+      <p:sp>
+        <p:nvSpPr>
+          <p:cNvPr id="4" name="Slide Number Placeholder 3"/>
+          <p:cNvSpPr>
+            <a:spLocks noGrp="1"/>
+          </p:cNvSpPr>
+          <p:nvPr>
+            <p:ph type="sldNum" sz="quarter" idx="5"/>
+          </p:nvPr>
+        </p:nvSpPr>
+        <p:spPr/>
+        <p:txBody>
+          <a:bodyPr/>
+          <a:lstStyle/>
+          <a:p>
+            <a:fld id="{D8903771-1C21-4762-A26D-AD891561B33E}" type="slidenum">
+              <a:rPr lang="en-CA" smtClean="0"/>
+              <a:t>16</a:t>
+            </a:fld>
+            <a:endParaRPr lang="en-CA"/>
+          </a:p>
+        </p:txBody>
+      </p:sp>
+    </p:spTree>
+    <p:extLst>
+      <p:ext uri="{BB962C8B-B14F-4D97-AF65-F5344CB8AC3E}">
+        <p14:creationId xmlns:p14="http://schemas.microsoft.com/office/powerpoint/2010/main" val="2509411096"/>
+      </p:ext>
+    </p:extLst>
+  </p:cSld>
+  <p:clrMapOvr>
+    <a:masterClrMapping/>
+  </p:clrMapOvr>
+</p:notes>
+</file>
+
+<file path=ppt/notesSlides/notesSlide17.xml><?xml version="1.0" encoding="utf-8"?>
+<p:notes xmlns:a="http://schemas.openxmlformats.org/drawingml/2006/main" xmlns:r="http://schemas.openxmlformats.org/officeDocument/2006/relationships" xmlns:p="http://schemas.openxmlformats.org/presentationml/2006/main">
+  <p:cSld>
+    <p:spTree>
+      <p:nvGrpSpPr>
+        <p:cNvPr id="1" name=""/>
+        <p:cNvGrpSpPr/>
+        <p:nvPr/>
+      </p:nvGrpSpPr>
+      <p:grpSpPr>
+        <a:xfrm>
+          <a:off x="0" y="0"/>
+          <a:ext cx="0" cy="0"/>
+          <a:chOff x="0" y="0"/>
+          <a:chExt cx="0" cy="0"/>
+        </a:xfrm>
+      </p:grpSpPr>
+      <p:sp>
+        <p:nvSpPr>
+          <p:cNvPr id="2" name="Slide Image Placeholder 1"/>
+          <p:cNvSpPr>
+            <a:spLocks noGrp="1" noRot="1" noChangeAspect="1"/>
+          </p:cNvSpPr>
+          <p:nvPr>
+            <p:ph type="sldImg"/>
+          </p:nvPr>
+        </p:nvSpPr>
+        <p:spPr/>
+      </p:sp>
+      <p:sp>
+        <p:nvSpPr>
+          <p:cNvPr id="3" name="Notes Placeholder 2"/>
+          <p:cNvSpPr>
+            <a:spLocks noGrp="1"/>
+          </p:cNvSpPr>
+          <p:nvPr>
+            <p:ph type="body" idx="1"/>
+          </p:nvPr>
+        </p:nvSpPr>
+        <p:spPr/>
+        <p:txBody>
+          <a:bodyPr/>
+          <a:lstStyle/>
+          <a:p>
+            <a:endParaRPr lang="en-CA"/>
+          </a:p>
+        </p:txBody>
+      </p:sp>
+      <p:sp>
+        <p:nvSpPr>
+          <p:cNvPr id="4" name="Slide Number Placeholder 3"/>
+          <p:cNvSpPr>
+            <a:spLocks noGrp="1"/>
+          </p:cNvSpPr>
+          <p:nvPr>
+            <p:ph type="sldNum" sz="quarter" idx="5"/>
+          </p:nvPr>
+        </p:nvSpPr>
+        <p:spPr/>
+        <p:txBody>
+          <a:bodyPr/>
+          <a:lstStyle/>
+          <a:p>
+            <a:fld id="{D8903771-1C21-4762-A26D-AD891561B33E}" type="slidenum">
+              <a:rPr lang="en-CA" smtClean="0"/>
+              <a:t>17</a:t>
+            </a:fld>
+            <a:endParaRPr lang="en-CA"/>
+          </a:p>
+        </p:txBody>
+      </p:sp>
+    </p:spTree>
+    <p:extLst>
+      <p:ext uri="{BB962C8B-B14F-4D97-AF65-F5344CB8AC3E}">
+        <p14:creationId xmlns:p14="http://schemas.microsoft.com/office/powerpoint/2010/main" val="4096369118"/>
+      </p:ext>
+    </p:extLst>
+  </p:cSld>
+  <p:clrMapOvr>
+    <a:masterClrMapping/>
+  </p:clrMapOvr>
+</p:notes>
+</file>
+
+<file path=ppt/notesSlides/notesSlide18.xml><?xml version="1.0" encoding="utf-8"?>
+<p:notes xmlns:a="http://schemas.openxmlformats.org/drawingml/2006/main" xmlns:r="http://schemas.openxmlformats.org/officeDocument/2006/relationships" xmlns:p="http://schemas.openxmlformats.org/presentationml/2006/main">
+  <p:cSld>
+    <p:spTree>
+      <p:nvGrpSpPr>
+        <p:cNvPr id="1" name=""/>
+        <p:cNvGrpSpPr/>
+        <p:nvPr/>
+      </p:nvGrpSpPr>
+      <p:grpSpPr>
+        <a:xfrm>
+          <a:off x="0" y="0"/>
+          <a:ext cx="0" cy="0"/>
+          <a:chOff x="0" y="0"/>
+          <a:chExt cx="0" cy="0"/>
+        </a:xfrm>
+      </p:grpSpPr>
+      <p:sp>
+        <p:nvSpPr>
+          <p:cNvPr id="2" name="Slide Image Placeholder 1"/>
+          <p:cNvSpPr>
+            <a:spLocks noGrp="1" noRot="1" noChangeAspect="1"/>
+          </p:cNvSpPr>
+          <p:nvPr>
+            <p:ph type="sldImg"/>
+          </p:nvPr>
+        </p:nvSpPr>
+        <p:spPr/>
+      </p:sp>
+      <p:sp>
+        <p:nvSpPr>
+          <p:cNvPr id="3" name="Notes Placeholder 2"/>
+          <p:cNvSpPr>
+            <a:spLocks noGrp="1"/>
+          </p:cNvSpPr>
+          <p:nvPr>
+            <p:ph type="body" idx="1"/>
+          </p:nvPr>
+        </p:nvSpPr>
+        <p:spPr/>
+        <p:txBody>
+          <a:bodyPr/>
+          <a:lstStyle/>
+          <a:p>
+            <a:endParaRPr lang="en-CA"/>
+          </a:p>
+        </p:txBody>
+      </p:sp>
+      <p:sp>
+        <p:nvSpPr>
+          <p:cNvPr id="4" name="Slide Number Placeholder 3"/>
+          <p:cNvSpPr>
+            <a:spLocks noGrp="1"/>
+          </p:cNvSpPr>
+          <p:nvPr>
+            <p:ph type="sldNum" sz="quarter" idx="5"/>
+          </p:nvPr>
+        </p:nvSpPr>
+        <p:spPr/>
+        <p:txBody>
+          <a:bodyPr/>
+          <a:lstStyle/>
+          <a:p>
+            <a:fld id="{D8903771-1C21-4762-A26D-AD891561B33E}" type="slidenum">
+              <a:rPr lang="en-CA" smtClean="0"/>
+              <a:t>18</a:t>
+            </a:fld>
+            <a:endParaRPr lang="en-CA"/>
+          </a:p>
+        </p:txBody>
+      </p:sp>
+    </p:spTree>
+    <p:extLst>
+      <p:ext uri="{BB962C8B-B14F-4D97-AF65-F5344CB8AC3E}">
+        <p14:creationId xmlns:p14="http://schemas.microsoft.com/office/powerpoint/2010/main" val="4188443633"/>
+      </p:ext>
+    </p:extLst>
+  </p:cSld>
+  <p:clrMapOvr>
+    <a:masterClrMapping/>
+  </p:clrMapOvr>
+</p:notes>
+</file>
+
+<file path=ppt/notesSlides/notesSlide2.xml><?xml version="1.0" encoding="utf-8"?>
+<p:notes xmlns:a="http://schemas.openxmlformats.org/drawingml/2006/main" xmlns:r="http://schemas.openxmlformats.org/officeDocument/2006/relationships" xmlns:p="http://schemas.openxmlformats.org/presentationml/2006/main">
+  <p:cSld>
+    <p:spTree>
+      <p:nvGrpSpPr>
+        <p:cNvPr id="1" name=""/>
+        <p:cNvGrpSpPr/>
+        <p:nvPr/>
+      </p:nvGrpSpPr>
+      <p:grpSpPr>
+        <a:xfrm>
+          <a:off x="0" y="0"/>
+          <a:ext cx="0" cy="0"/>
+          <a:chOff x="0" y="0"/>
+          <a:chExt cx="0" cy="0"/>
+        </a:xfrm>
+      </p:grpSpPr>
+      <p:sp>
+        <p:nvSpPr>
+          <p:cNvPr id="2" name="Slide Image Placeholder 1"/>
+          <p:cNvSpPr>
+            <a:spLocks noGrp="1" noRot="1" noChangeAspect="1"/>
+          </p:cNvSpPr>
+          <p:nvPr>
+            <p:ph type="sldImg"/>
+          </p:nvPr>
+        </p:nvSpPr>
+        <p:spPr/>
+      </p:sp>
+      <p:sp>
+        <p:nvSpPr>
+          <p:cNvPr id="3" name="Notes Placeholder 2"/>
+          <p:cNvSpPr>
+            <a:spLocks noGrp="1"/>
+          </p:cNvSpPr>
+          <p:nvPr>
+            <p:ph type="body" idx="1"/>
+          </p:nvPr>
+        </p:nvSpPr>
+        <p:spPr/>
+        <p:txBody>
+          <a:bodyPr/>
+          <a:lstStyle/>
+          <a:p>
+            <a:endParaRPr lang="en-CA" dirty="0"/>
+          </a:p>
+        </p:txBody>
+      </p:sp>
+      <p:sp>
+        <p:nvSpPr>
+          <p:cNvPr id="4" name="Slide Number Placeholder 3"/>
+          <p:cNvSpPr>
+            <a:spLocks noGrp="1"/>
+          </p:cNvSpPr>
+          <p:nvPr>
+            <p:ph type="sldNum" sz="quarter" idx="5"/>
+          </p:nvPr>
+        </p:nvSpPr>
+        <p:spPr/>
+        <p:txBody>
+          <a:bodyPr/>
+          <a:lstStyle/>
+          <a:p>
+            <a:fld id="{D8903771-1C21-4762-A26D-AD891561B33E}" type="slidenum">
+              <a:rPr lang="en-CA" smtClean="0"/>
+              <a:t>2</a:t>
+            </a:fld>
+            <a:endParaRPr lang="en-CA"/>
+          </a:p>
+        </p:txBody>
+      </p:sp>
+    </p:spTree>
+    <p:extLst>
+      <p:ext uri="{BB962C8B-B14F-4D97-AF65-F5344CB8AC3E}">
+        <p14:creationId xmlns:p14="http://schemas.microsoft.com/office/powerpoint/2010/main" val="2090264478"/>
+      </p:ext>
+    </p:extLst>
+  </p:cSld>
+  <p:clrMapOvr>
+    <a:masterClrMapping/>
+  </p:clrMapOvr>
+</p:notes>
+</file>
+
+<file path=ppt/notesSlides/notesSlide3.xml><?xml version="1.0" encoding="utf-8"?>
+<p:notes xmlns:a="http://schemas.openxmlformats.org/drawingml/2006/main" xmlns:r="http://schemas.openxmlformats.org/officeDocument/2006/relationships" xmlns:p="http://schemas.openxmlformats.org/presentationml/2006/main">
+  <p:cSld>
+    <p:spTree>
+      <p:nvGrpSpPr>
+        <p:cNvPr id="1" name=""/>
+        <p:cNvGrpSpPr/>
+        <p:nvPr/>
+      </p:nvGrpSpPr>
+      <p:grpSpPr>
+        <a:xfrm>
+          <a:off x="0" y="0"/>
+          <a:ext cx="0" cy="0"/>
+          <a:chOff x="0" y="0"/>
+          <a:chExt cx="0" cy="0"/>
+        </a:xfrm>
+      </p:grpSpPr>
+      <p:sp>
+        <p:nvSpPr>
+          <p:cNvPr id="2" name="Slide Image Placeholder 1"/>
+          <p:cNvSpPr>
+            <a:spLocks noGrp="1" noRot="1" noChangeAspect="1"/>
+          </p:cNvSpPr>
+          <p:nvPr>
+            <p:ph type="sldImg"/>
+          </p:nvPr>
+        </p:nvSpPr>
+        <p:spPr/>
+      </p:sp>
+      <p:sp>
+        <p:nvSpPr>
+          <p:cNvPr id="3" name="Notes Placeholder 2"/>
+          <p:cNvSpPr>
+            <a:spLocks noGrp="1"/>
+          </p:cNvSpPr>
+          <p:nvPr>
+            <p:ph type="body" idx="1"/>
+          </p:nvPr>
+        </p:nvSpPr>
+        <p:spPr/>
+        <p:txBody>
+          <a:bodyPr/>
+          <a:lstStyle/>
+          <a:p>
+            <a:endParaRPr lang="en-CA" dirty="0"/>
+          </a:p>
+        </p:txBody>
+      </p:sp>
+      <p:sp>
+        <p:nvSpPr>
+          <p:cNvPr id="4" name="Slide Number Placeholder 3"/>
+          <p:cNvSpPr>
+            <a:spLocks noGrp="1"/>
+          </p:cNvSpPr>
+          <p:nvPr>
+            <p:ph type="sldNum" sz="quarter" idx="5"/>
+          </p:nvPr>
+        </p:nvSpPr>
+        <p:spPr/>
+        <p:txBody>
+          <a:bodyPr/>
+          <a:lstStyle/>
+          <a:p>
+            <a:fld id="{D8903771-1C21-4762-A26D-AD891561B33E}" type="slidenum">
+              <a:rPr lang="en-CA" smtClean="0"/>
+              <a:t>3</a:t>
+            </a:fld>
+            <a:endParaRPr lang="en-CA"/>
+          </a:p>
+        </p:txBody>
+      </p:sp>
+    </p:spTree>
+    <p:extLst>
+      <p:ext uri="{BB962C8B-B14F-4D97-AF65-F5344CB8AC3E}">
+        <p14:creationId xmlns:p14="http://schemas.microsoft.com/office/powerpoint/2010/main" val="1839934165"/>
+      </p:ext>
+    </p:extLst>
+  </p:cSld>
+  <p:clrMapOvr>
+    <a:masterClrMapping/>
+  </p:clrMapOvr>
+</p:notes>
+</file>
+
+<file path=ppt/notesSlides/notesSlide4.xml><?xml version="1.0" encoding="utf-8"?>
+<p:notes xmlns:a="http://schemas.openxmlformats.org/drawingml/2006/main" xmlns:r="http://schemas.openxmlformats.org/officeDocument/2006/relationships" xmlns:p="http://schemas.openxmlformats.org/presentationml/2006/main">
+  <p:cSld>
+    <p:spTree>
+      <p:nvGrpSpPr>
+        <p:cNvPr id="1" name=""/>
+        <p:cNvGrpSpPr/>
+        <p:nvPr/>
+      </p:nvGrpSpPr>
+      <p:grpSpPr>
+        <a:xfrm>
+          <a:off x="0" y="0"/>
+          <a:ext cx="0" cy="0"/>
+          <a:chOff x="0" y="0"/>
+          <a:chExt cx="0" cy="0"/>
+        </a:xfrm>
+      </p:grpSpPr>
+      <p:sp>
+        <p:nvSpPr>
+          <p:cNvPr id="2" name="Slide Image Placeholder 1"/>
+          <p:cNvSpPr>
+            <a:spLocks noGrp="1" noRot="1" noChangeAspect="1"/>
+          </p:cNvSpPr>
+          <p:nvPr>
+            <p:ph type="sldImg"/>
+          </p:nvPr>
+        </p:nvSpPr>
+        <p:spPr/>
+      </p:sp>
+      <p:sp>
+        <p:nvSpPr>
+          <p:cNvPr id="3" name="Notes Placeholder 2"/>
+          <p:cNvSpPr>
+            <a:spLocks noGrp="1"/>
+          </p:cNvSpPr>
+          <p:nvPr>
+            <p:ph type="body" idx="1"/>
+          </p:nvPr>
+        </p:nvSpPr>
+        <p:spPr/>
+        <p:txBody>
+          <a:bodyPr/>
+          <a:lstStyle/>
+          <a:p>
+            <a:endParaRPr lang="en-CA" dirty="0"/>
+          </a:p>
+        </p:txBody>
+      </p:sp>
+      <p:sp>
+        <p:nvSpPr>
+          <p:cNvPr id="4" name="Slide Number Placeholder 3"/>
+          <p:cNvSpPr>
+            <a:spLocks noGrp="1"/>
+          </p:cNvSpPr>
+          <p:nvPr>
+            <p:ph type="sldNum" sz="quarter" idx="5"/>
+          </p:nvPr>
+        </p:nvSpPr>
+        <p:spPr/>
+        <p:txBody>
+          <a:bodyPr/>
+          <a:lstStyle/>
+          <a:p>
+            <a:fld id="{D8903771-1C21-4762-A26D-AD891561B33E}" type="slidenum">
+              <a:rPr lang="en-CA" smtClean="0"/>
+              <a:t>4</a:t>
+            </a:fld>
+            <a:endParaRPr lang="en-CA"/>
+          </a:p>
+        </p:txBody>
+      </p:sp>
+    </p:spTree>
+    <p:extLst>
+      <p:ext uri="{BB962C8B-B14F-4D97-AF65-F5344CB8AC3E}">
+        <p14:creationId xmlns:p14="http://schemas.microsoft.com/office/powerpoint/2010/main" val="3680906298"/>
+      </p:ext>
+    </p:extLst>
+  </p:cSld>
+  <p:clrMapOvr>
+    <a:masterClrMapping/>
+  </p:clrMapOvr>
+</p:notes>
+</file>
+
+<file path=ppt/notesSlides/notesSlide5.xml><?xml version="1.0" encoding="utf-8"?>
+<p:notes xmlns:a="http://schemas.openxmlformats.org/drawingml/2006/main" xmlns:r="http://schemas.openxmlformats.org/officeDocument/2006/relationships" xmlns:p="http://schemas.openxmlformats.org/presentationml/2006/main">
+  <p:cSld>
+    <p:spTree>
+      <p:nvGrpSpPr>
+        <p:cNvPr id="1" name=""/>
+        <p:cNvGrpSpPr/>
+        <p:nvPr/>
+      </p:nvGrpSpPr>
+      <p:grpSpPr>
+        <a:xfrm>
+          <a:off x="0" y="0"/>
+          <a:ext cx="0" cy="0"/>
+          <a:chOff x="0" y="0"/>
+          <a:chExt cx="0" cy="0"/>
+        </a:xfrm>
+      </p:grpSpPr>
+      <p:sp>
+        <p:nvSpPr>
+          <p:cNvPr id="2" name="Slide Image Placeholder 1"/>
+          <p:cNvSpPr>
+            <a:spLocks noGrp="1" noRot="1" noChangeAspect="1"/>
+          </p:cNvSpPr>
+          <p:nvPr>
+            <p:ph type="sldImg"/>
+          </p:nvPr>
+        </p:nvSpPr>
+        <p:spPr/>
+      </p:sp>
+      <p:sp>
+        <p:nvSpPr>
+          <p:cNvPr id="3" name="Notes Placeholder 2"/>
+          <p:cNvSpPr>
+            <a:spLocks noGrp="1"/>
+          </p:cNvSpPr>
+          <p:nvPr>
+            <p:ph type="body" idx="1"/>
+          </p:nvPr>
+        </p:nvSpPr>
+        <p:spPr/>
+        <p:txBody>
+          <a:bodyPr/>
+          <a:lstStyle/>
+          <a:p>
+            <a:endParaRPr lang="en-CA" dirty="0"/>
+          </a:p>
+        </p:txBody>
+      </p:sp>
+      <p:sp>
+        <p:nvSpPr>
+          <p:cNvPr id="4" name="Slide Number Placeholder 3"/>
+          <p:cNvSpPr>
+            <a:spLocks noGrp="1"/>
+          </p:cNvSpPr>
+          <p:nvPr>
+            <p:ph type="sldNum" sz="quarter" idx="5"/>
+          </p:nvPr>
+        </p:nvSpPr>
+        <p:spPr/>
+        <p:txBody>
+          <a:bodyPr/>
+          <a:lstStyle/>
+          <a:p>
+            <a:fld id="{D8903771-1C21-4762-A26D-AD891561B33E}" type="slidenum">
+              <a:rPr lang="en-CA" smtClean="0"/>
+              <a:t>5</a:t>
+            </a:fld>
+            <a:endParaRPr lang="en-CA"/>
+          </a:p>
+        </p:txBody>
+      </p:sp>
+    </p:spTree>
+    <p:extLst>
+      <p:ext uri="{BB962C8B-B14F-4D97-AF65-F5344CB8AC3E}">
+        <p14:creationId xmlns:p14="http://schemas.microsoft.com/office/powerpoint/2010/main" val="793421765"/>
+      </p:ext>
+    </p:extLst>
+  </p:cSld>
+  <p:clrMapOvr>
+    <a:masterClrMapping/>
+  </p:clrMapOvr>
+</p:notes>
+</file>
+
+<file path=ppt/notesSlides/notesSlide6.xml><?xml version="1.0" encoding="utf-8"?>
+<p:notes xmlns:a="http://schemas.openxmlformats.org/drawingml/2006/main" xmlns:r="http://schemas.openxmlformats.org/officeDocument/2006/relationships" xmlns:p="http://schemas.openxmlformats.org/presentationml/2006/main">
+  <p:cSld>
+    <p:spTree>
+      <p:nvGrpSpPr>
+        <p:cNvPr id="1" name=""/>
+        <p:cNvGrpSpPr/>
+        <p:nvPr/>
+      </p:nvGrpSpPr>
+      <p:grpSpPr>
+        <a:xfrm>
+          <a:off x="0" y="0"/>
+          <a:ext cx="0" cy="0"/>
+          <a:chOff x="0" y="0"/>
+          <a:chExt cx="0" cy="0"/>
+        </a:xfrm>
+      </p:grpSpPr>
+      <p:sp>
+        <p:nvSpPr>
+          <p:cNvPr id="2" name="Slide Image Placeholder 1"/>
+          <p:cNvSpPr>
+            <a:spLocks noGrp="1" noRot="1" noChangeAspect="1"/>
+          </p:cNvSpPr>
+          <p:nvPr>
+            <p:ph type="sldImg"/>
+          </p:nvPr>
+        </p:nvSpPr>
+        <p:spPr/>
+      </p:sp>
+      <p:sp>
+        <p:nvSpPr>
+          <p:cNvPr id="3" name="Notes Placeholder 2"/>
+          <p:cNvSpPr>
+            <a:spLocks noGrp="1"/>
+          </p:cNvSpPr>
+          <p:nvPr>
+            <p:ph type="body" idx="1"/>
+          </p:nvPr>
+        </p:nvSpPr>
+        <p:spPr/>
+        <p:txBody>
+          <a:bodyPr/>
+          <a:lstStyle/>
+          <a:p>
+            <a:endParaRPr lang="en-CA" dirty="0"/>
+          </a:p>
+        </p:txBody>
+      </p:sp>
+      <p:sp>
+        <p:nvSpPr>
+          <p:cNvPr id="4" name="Slide Number Placeholder 3"/>
+          <p:cNvSpPr>
+            <a:spLocks noGrp="1"/>
+          </p:cNvSpPr>
+          <p:nvPr>
+            <p:ph type="sldNum" sz="quarter" idx="5"/>
+          </p:nvPr>
+        </p:nvSpPr>
+        <p:spPr/>
+        <p:txBody>
+          <a:bodyPr/>
+          <a:lstStyle/>
+          <a:p>
+            <a:fld id="{D8903771-1C21-4762-A26D-AD891561B33E}" type="slidenum">
+              <a:rPr lang="en-CA" smtClean="0"/>
+              <a:t>6</a:t>
+            </a:fld>
+            <a:endParaRPr lang="en-CA"/>
+          </a:p>
+        </p:txBody>
+      </p:sp>
+    </p:spTree>
+    <p:extLst>
+      <p:ext uri="{BB962C8B-B14F-4D97-AF65-F5344CB8AC3E}">
+        <p14:creationId xmlns:p14="http://schemas.microsoft.com/office/powerpoint/2010/main" val="728040578"/>
+      </p:ext>
+    </p:extLst>
+  </p:cSld>
+  <p:clrMapOvr>
+    <a:masterClrMapping/>
+  </p:clrMapOvr>
+</p:notes>
+</file>
+
+<file path=ppt/notesSlides/notesSlide7.xml><?xml version="1.0" encoding="utf-8"?>
+<p:notes xmlns:a="http://schemas.openxmlformats.org/drawingml/2006/main" xmlns:r="http://schemas.openxmlformats.org/officeDocument/2006/relationships" xmlns:p="http://schemas.openxmlformats.org/presentationml/2006/main">
+  <p:cSld>
+    <p:spTree>
+      <p:nvGrpSpPr>
+        <p:cNvPr id="1" name=""/>
+        <p:cNvGrpSpPr/>
+        <p:nvPr/>
+      </p:nvGrpSpPr>
+      <p:grpSpPr>
+        <a:xfrm>
+          <a:off x="0" y="0"/>
+          <a:ext cx="0" cy="0"/>
+          <a:chOff x="0" y="0"/>
+          <a:chExt cx="0" cy="0"/>
+        </a:xfrm>
+      </p:grpSpPr>
+      <p:sp>
+        <p:nvSpPr>
+          <p:cNvPr id="2" name="Slide Image Placeholder 1"/>
+          <p:cNvSpPr>
+            <a:spLocks noGrp="1" noRot="1" noChangeAspect="1"/>
+          </p:cNvSpPr>
+          <p:nvPr>
+            <p:ph type="sldImg"/>
+          </p:nvPr>
+        </p:nvSpPr>
+        <p:spPr/>
+      </p:sp>
+      <p:sp>
+        <p:nvSpPr>
+          <p:cNvPr id="3" name="Notes Placeholder 2"/>
+          <p:cNvSpPr>
+            <a:spLocks noGrp="1"/>
+          </p:cNvSpPr>
+          <p:nvPr>
+            <p:ph type="body" idx="1"/>
+          </p:nvPr>
+        </p:nvSpPr>
+        <p:spPr/>
+        <p:txBody>
+          <a:bodyPr/>
+          <a:lstStyle/>
+          <a:p>
+            <a:endParaRPr lang="en-CA" dirty="0"/>
+          </a:p>
+        </p:txBody>
+      </p:sp>
+      <p:sp>
+        <p:nvSpPr>
+          <p:cNvPr id="4" name="Slide Number Placeholder 3"/>
+          <p:cNvSpPr>
+            <a:spLocks noGrp="1"/>
+          </p:cNvSpPr>
+          <p:nvPr>
+            <p:ph type="sldNum" sz="quarter" idx="5"/>
+          </p:nvPr>
+        </p:nvSpPr>
+        <p:spPr/>
+        <p:txBody>
+          <a:bodyPr/>
+          <a:lstStyle/>
+          <a:p>
+            <a:fld id="{D8903771-1C21-4762-A26D-AD891561B33E}" type="slidenum">
+              <a:rPr lang="en-CA" smtClean="0"/>
+              <a:t>7</a:t>
+            </a:fld>
+            <a:endParaRPr lang="en-CA"/>
+          </a:p>
+        </p:txBody>
+      </p:sp>
+    </p:spTree>
+    <p:extLst>
+      <p:ext uri="{BB962C8B-B14F-4D97-AF65-F5344CB8AC3E}">
+        <p14:creationId xmlns:p14="http://schemas.microsoft.com/office/powerpoint/2010/main" val="3891963428"/>
+      </p:ext>
+    </p:extLst>
+  </p:cSld>
+  <p:clrMapOvr>
+    <a:masterClrMapping/>
+  </p:clrMapOvr>
+</p:notes>
+</file>
+
+<file path=ppt/notesSlides/notesSlide8.xml><?xml version="1.0" encoding="utf-8"?>
+<p:notes xmlns:a="http://schemas.openxmlformats.org/drawingml/2006/main" xmlns:r="http://schemas.openxmlformats.org/officeDocument/2006/relationships" xmlns:p="http://schemas.openxmlformats.org/presentationml/2006/main">
+  <p:cSld>
+    <p:spTree>
+      <p:nvGrpSpPr>
+        <p:cNvPr id="1" name=""/>
+        <p:cNvGrpSpPr/>
+        <p:nvPr/>
+      </p:nvGrpSpPr>
+      <p:grpSpPr>
+        <a:xfrm>
+          <a:off x="0" y="0"/>
+          <a:ext cx="0" cy="0"/>
+          <a:chOff x="0" y="0"/>
+          <a:chExt cx="0" cy="0"/>
+        </a:xfrm>
+      </p:grpSpPr>
+      <p:sp>
+        <p:nvSpPr>
+          <p:cNvPr id="2" name="Slide Image Placeholder 1"/>
+          <p:cNvSpPr>
+            <a:spLocks noGrp="1" noRot="1" noChangeAspect="1"/>
+          </p:cNvSpPr>
+          <p:nvPr>
+            <p:ph type="sldImg"/>
+          </p:nvPr>
+        </p:nvSpPr>
+        <p:spPr/>
+      </p:sp>
+      <p:sp>
+        <p:nvSpPr>
+          <p:cNvPr id="3" name="Notes Placeholder 2"/>
+          <p:cNvSpPr>
+            <a:spLocks noGrp="1"/>
+          </p:cNvSpPr>
+          <p:nvPr>
+            <p:ph type="body" idx="1"/>
+          </p:nvPr>
+        </p:nvSpPr>
+        <p:spPr/>
+        <p:txBody>
+          <a:bodyPr/>
+          <a:lstStyle/>
+          <a:p>
+            <a:endParaRPr lang="en-CA" dirty="0"/>
+          </a:p>
+        </p:txBody>
+      </p:sp>
+      <p:sp>
+        <p:nvSpPr>
+          <p:cNvPr id="4" name="Slide Number Placeholder 3"/>
+          <p:cNvSpPr>
+            <a:spLocks noGrp="1"/>
+          </p:cNvSpPr>
+          <p:nvPr>
+            <p:ph type="sldNum" sz="quarter" idx="5"/>
+          </p:nvPr>
+        </p:nvSpPr>
+        <p:spPr/>
+        <p:txBody>
+          <a:bodyPr/>
+          <a:lstStyle/>
+          <a:p>
+            <a:fld id="{D8903771-1C21-4762-A26D-AD891561B33E}" type="slidenum">
+              <a:rPr lang="en-CA" smtClean="0"/>
+              <a:t>8</a:t>
+            </a:fld>
+            <a:endParaRPr lang="en-CA"/>
+          </a:p>
+        </p:txBody>
+      </p:sp>
+    </p:spTree>
+    <p:extLst>
+      <p:ext uri="{BB962C8B-B14F-4D97-AF65-F5344CB8AC3E}">
+        <p14:creationId xmlns:p14="http://schemas.microsoft.com/office/powerpoint/2010/main" val="3753353274"/>
+      </p:ext>
+    </p:extLst>
+  </p:cSld>
+  <p:clrMapOvr>
+    <a:masterClrMapping/>
+  </p:clrMapOvr>
+</p:notes>
+</file>
+
+<file path=ppt/notesSlides/notesSlide9.xml><?xml version="1.0" encoding="utf-8"?>
+<p:notes xmlns:a="http://schemas.openxmlformats.org/drawingml/2006/main" xmlns:r="http://schemas.openxmlformats.org/officeDocument/2006/relationships" xmlns:p="http://schemas.openxmlformats.org/presentationml/2006/main">
+  <p:cSld>
+    <p:spTree>
+      <p:nvGrpSpPr>
+        <p:cNvPr id="1" name=""/>
+        <p:cNvGrpSpPr/>
+        <p:nvPr/>
+      </p:nvGrpSpPr>
+      <p:grpSpPr>
+        <a:xfrm>
+          <a:off x="0" y="0"/>
+          <a:ext cx="0" cy="0"/>
+          <a:chOff x="0" y="0"/>
+          <a:chExt cx="0" cy="0"/>
+        </a:xfrm>
+      </p:grpSpPr>
+      <p:sp>
+        <p:nvSpPr>
+          <p:cNvPr id="2" name="Slide Image Placeholder 1"/>
+          <p:cNvSpPr>
+            <a:spLocks noGrp="1" noRot="1" noChangeAspect="1"/>
+          </p:cNvSpPr>
+          <p:nvPr>
+            <p:ph type="sldImg"/>
+          </p:nvPr>
+        </p:nvSpPr>
+        <p:spPr/>
+      </p:sp>
+      <p:sp>
+        <p:nvSpPr>
+          <p:cNvPr id="3" name="Notes Placeholder 2"/>
+          <p:cNvSpPr>
+            <a:spLocks noGrp="1"/>
+          </p:cNvSpPr>
+          <p:nvPr>
+            <p:ph type="body" idx="1"/>
+          </p:nvPr>
+        </p:nvSpPr>
+        <p:spPr/>
+        <p:txBody>
+          <a:bodyPr/>
+          <a:lstStyle/>
+          <a:p>
+            <a:endParaRPr lang="en-CA" dirty="0"/>
+          </a:p>
+        </p:txBody>
+      </p:sp>
+      <p:sp>
+        <p:nvSpPr>
+          <p:cNvPr id="4" name="Slide Number Placeholder 3"/>
+          <p:cNvSpPr>
+            <a:spLocks noGrp="1"/>
+          </p:cNvSpPr>
+          <p:nvPr>
+            <p:ph type="sldNum" sz="quarter" idx="5"/>
+          </p:nvPr>
+        </p:nvSpPr>
+        <p:spPr/>
+        <p:txBody>
+          <a:bodyPr/>
+          <a:lstStyle/>
+          <a:p>
+            <a:fld id="{D8903771-1C21-4762-A26D-AD891561B33E}" type="slidenum">
+              <a:rPr lang="en-CA" smtClean="0"/>
+              <a:t>9</a:t>
+            </a:fld>
+            <a:endParaRPr lang="en-CA"/>
+          </a:p>
+        </p:txBody>
+      </p:sp>
+    </p:spTree>
+    <p:extLst>
+      <p:ext uri="{BB962C8B-B14F-4D97-AF65-F5344CB8AC3E}">
+        <p14:creationId xmlns:p14="http://schemas.microsoft.com/office/powerpoint/2010/main" val="3321312916"/>
+      </p:ext>
+    </p:extLst>
+  </p:cSld>
+  <p:clrMapOvr>
+    <a:masterClrMapping/>
+  </p:clrMapOvr>
+</p:notes>
 </file>
 
 <file path=ppt/slideLayouts/slideLayout1.xml><?xml version="1.0" encoding="utf-8"?>
@@ -866,7 +2381,7 @@
           <a:p>
             <a:fld id="{B5230D84-9CC6-4466-BF92-3A09D059855E}" type="datetime1">
               <a:rPr lang="en-US" smtClean="0"/>
-              <a:t>4/26/2026</a:t>
+              <a:t>5/21/2026</a:t>
             </a:fld>
             <a:endParaRPr lang="en-US"/>
           </a:p>
@@ -1034,7 +2549,7 @@
           <a:p>
             <a:fld id="{47639967-C7A7-485A-B282-A4E084FB496A}" type="datetime1">
               <a:rPr lang="en-US" smtClean="0"/>
-              <a:t>4/26/2026</a:t>
+              <a:t>5/21/2026</a:t>
             </a:fld>
             <a:endParaRPr lang="en-US"/>
           </a:p>
@@ -1212,7 +2727,7 @@
           <a:p>
             <a:fld id="{433431AD-4879-43DB-B1EE-88A0F7561F13}" type="datetime1">
               <a:rPr lang="en-US" smtClean="0"/>
-              <a:t>4/26/2026</a:t>
+              <a:t>5/21/2026</a:t>
             </a:fld>
             <a:endParaRPr lang="en-US"/>
           </a:p>
@@ -1380,7 +2895,7 @@
           <a:p>
             <a:fld id="{8368E3BE-947F-467C-86F3-28A59084276B}" type="datetime1">
               <a:rPr lang="en-US" smtClean="0"/>
-              <a:t>4/26/2026</a:t>
+              <a:t>5/21/2026</a:t>
             </a:fld>
             <a:endParaRPr lang="en-US"/>
           </a:p>
@@ -1625,7 +3140,7 @@
           <a:p>
             <a:fld id="{8444E8C8-5C2C-49AB-A871-6C04BDD49264}" type="datetime1">
               <a:rPr lang="en-US" smtClean="0"/>
-              <a:t>4/26/2026</a:t>
+              <a:t>5/21/2026</a:t>
             </a:fld>
             <a:endParaRPr lang="en-US"/>
           </a:p>
@@ -1910,7 +3425,7 @@
           <a:p>
             <a:fld id="{A427F44C-38C2-43C2-992A-48ADACACFDE6}" type="datetime1">
               <a:rPr lang="en-US" smtClean="0"/>
-              <a:t>4/26/2026</a:t>
+              <a:t>5/21/2026</a:t>
             </a:fld>
             <a:endParaRPr lang="en-US"/>
           </a:p>
@@ -2329,7 +3844,7 @@
           <a:p>
             <a:fld id="{2398447B-195F-42CC-A7D9-53BEDAB141E0}" type="datetime1">
               <a:rPr lang="en-US" smtClean="0"/>
-              <a:t>4/26/2026</a:t>
+              <a:t>5/21/2026</a:t>
             </a:fld>
             <a:endParaRPr lang="en-US"/>
           </a:p>
@@ -2446,7 +3961,7 @@
           <a:p>
             <a:fld id="{B37710E4-4921-404F-A877-9E79D17D77BB}" type="datetime1">
               <a:rPr lang="en-US" smtClean="0"/>
-              <a:t>4/26/2026</a:t>
+              <a:t>5/21/2026</a:t>
             </a:fld>
             <a:endParaRPr lang="en-US"/>
           </a:p>
@@ -2541,7 +4056,7 @@
           <a:p>
             <a:fld id="{88CD1311-A8BE-4EA4-9E8A-2BEA6330071C}" type="datetime1">
               <a:rPr lang="en-US" smtClean="0"/>
-              <a:t>4/26/2026</a:t>
+              <a:t>5/21/2026</a:t>
             </a:fld>
             <a:endParaRPr lang="en-US"/>
           </a:p>
@@ -2816,7 +4331,7 @@
           <a:p>
             <a:fld id="{CF9DE98A-0D93-4A51-9BF4-5E11680B8F82}" type="datetime1">
               <a:rPr lang="en-US" smtClean="0"/>
-              <a:t>4/26/2026</a:t>
+              <a:t>5/21/2026</a:t>
             </a:fld>
             <a:endParaRPr lang="en-US"/>
           </a:p>
@@ -3068,7 +4583,7 @@
           <a:p>
             <a:fld id="{4354B95B-7246-4869-867C-9EF5CF9F6B4F}" type="datetime1">
               <a:rPr lang="en-US" smtClean="0"/>
-              <a:t>4/26/2026</a:t>
+              <a:t>5/21/2026</a:t>
             </a:fld>
             <a:endParaRPr lang="en-US"/>
           </a:p>
@@ -3279,7 +4794,7 @@
           <a:p>
             <a:fld id="{38018196-63ED-4E20-B56A-1A49F9BCC0A7}" type="datetime1">
               <a:rPr lang="en-US" smtClean="0"/>
-              <a:t>4/26/2026</a:t>
+              <a:t>5/21/2026</a:t>
             </a:fld>
             <a:endParaRPr lang="en-US"/>
           </a:p>
@@ -4400,8 +5915,21 @@
                   <a:srgbClr val="FFFFFF"/>
                 </a:solidFill>
               </a:rPr>
-              <a:t>Principal Data Scientist at ATB Financial</a:t>
-            </a:r>
+              <a:t>Principal </a:t>
+            </a:r>
+            <a:r>
+              <a:rPr lang="en-CA" sz="2500">
+                <a:solidFill>
+                  <a:srgbClr val="FFFFFF"/>
+                </a:solidFill>
+              </a:rPr>
+              <a:t>Data Scientist</a:t>
+            </a:r>
+            <a:endParaRPr lang="en-CA" sz="2500" dirty="0">
+              <a:solidFill>
+                <a:srgbClr val="FFFFFF"/>
+              </a:solidFill>
+            </a:endParaRPr>
           </a:p>
         </p:txBody>
       </p:sp>
@@ -4519,7 +6047,7 @@
           <p:nvPr/>
         </p:nvPicPr>
         <p:blipFill>
-          <a:blip r:embed="rId2"/>
+          <a:blip r:embed="rId3"/>
           <a:srcRect l="21472" t="25545" r="27846" b="58118"/>
           <a:stretch>
             <a:fillRect/>
@@ -5004,7 +6532,7 @@
           <p:nvPr/>
         </p:nvPicPr>
         <p:blipFill>
-          <a:blip r:embed="rId3"/>
+          <a:blip r:embed="rId4"/>
           <a:stretch>
             <a:fillRect/>
           </a:stretch>
@@ -5346,7 +6874,7 @@
           <p:nvPr/>
         </p:nvPicPr>
         <p:blipFill>
-          <a:blip r:embed="rId2">
+          <a:blip r:embed="rId3">
             <a:extLst>
               <a:ext uri="{28A0092B-C50C-407E-A947-70E740481C1C}">
                 <a14:useLocalDpi xmlns:a14="http://schemas.microsoft.com/office/drawing/2010/main" val="0"/>
@@ -5633,7 +7161,7 @@
           <p:nvPr/>
         </p:nvPicPr>
         <p:blipFill>
-          <a:blip r:embed="rId3">
+          <a:blip r:embed="rId4">
             <a:extLst>
               <a:ext uri="{28A0092B-C50C-407E-A947-70E740481C1C}">
                 <a14:useLocalDpi xmlns:a14="http://schemas.microsoft.com/office/drawing/2010/main" val="0"/>
@@ -5859,7 +7387,7 @@
             <a:r>
               <a:rPr lang="en-US" altLang="en-US" sz="1400" dirty="0">
                 <a:latin typeface="Arial" panose="020B0604020202020204" pitchFamily="34" charset="0"/>
-                <a:hlinkClick r:id="rId2"/>
+                <a:hlinkClick r:id="rId3"/>
               </a:rPr>
               <a:t>https://mehdirezvandehy.github.io/index.html</a:t>
             </a:r>
@@ -5909,7 +7437,7 @@
           <p:nvPr/>
         </p:nvPicPr>
         <p:blipFill>
-          <a:blip r:embed="rId3"/>
+          <a:blip r:embed="rId4"/>
           <a:stretch>
             <a:fillRect/>
           </a:stretch>
@@ -6150,28 +7678,28 @@
             <a:r>
               <a:rPr lang="en-US" altLang="en-US" sz="1400" dirty="0">
                 <a:latin typeface="Arial" panose="020B0604020202020204" pitchFamily="34" charset="0"/>
-                <a:hlinkClick r:id="rId4"/>
+                <a:hlinkClick r:id="rId5"/>
               </a:rPr>
               <a:t>end-to-end-ml-app-stack-with-</a:t>
             </a:r>
             <a:r>
               <a:rPr lang="en-US" altLang="en-US" sz="1400" dirty="0" err="1">
                 <a:latin typeface="Arial" panose="020B0604020202020204" pitchFamily="34" charset="0"/>
-                <a:hlinkClick r:id="rId4"/>
+                <a:hlinkClick r:id="rId5"/>
               </a:rPr>
               <a:t>mlflow</a:t>
             </a:r>
             <a:r>
               <a:rPr lang="en-US" altLang="en-US" sz="1400" dirty="0">
                 <a:latin typeface="Arial" panose="020B0604020202020204" pitchFamily="34" charset="0"/>
-                <a:hlinkClick r:id="rId4"/>
+                <a:hlinkClick r:id="rId5"/>
               </a:rPr>
               <a:t>-</a:t>
             </a:r>
             <a:r>
               <a:rPr lang="en-US" altLang="en-US" sz="1400" dirty="0" err="1">
                 <a:latin typeface="Arial" panose="020B0604020202020204" pitchFamily="34" charset="0"/>
-                <a:hlinkClick r:id="rId4"/>
+                <a:hlinkClick r:id="rId5"/>
               </a:rPr>
               <a:t>fastapi-streamlit</a:t>
             </a:r>
@@ -6199,7 +7727,7 @@
           <p:nvPr/>
         </p:nvPicPr>
         <p:blipFill>
-          <a:blip r:embed="rId5"/>
+          <a:blip r:embed="rId6"/>
           <a:srcRect b="41661"/>
           <a:stretch>
             <a:fillRect/>
@@ -6844,7 +8372,7 @@
               </a:lnSpc>
             </a:pPr>
             <a:r>
-              <a:rPr lang="en-US" sz="4200" kern="1200">
+              <a:rPr lang="en-US" sz="4200" kern="1200" dirty="0">
                 <a:solidFill>
                   <a:srgbClr val="FFFFFF"/>
                 </a:solidFill>
@@ -7115,7 +8643,7 @@
                 <a14:useLocalDpi xmlns:a14="http://schemas.microsoft.com/office/drawing/2010/main" val="0"/>
               </a:ext>
               <a:ext uri="{96DAC541-7B7A-43D3-8B79-37D633B846F1}">
-                <asvg:svgBlip xmlns:asvg="http://schemas.microsoft.com/office/drawing/2016/SVG/main" r:embed="rId2"/>
+                <asvg:svgBlip xmlns:asvg="http://schemas.microsoft.com/office/drawing/2016/SVG/main" r:embed="rId3"/>
               </a:ext>
             </a:extLst>
           </a:blip>
@@ -9459,7 +10987,7 @@
           <p:nvPr/>
         </p:nvPicPr>
         <p:blipFill>
-          <a:blip r:embed="rId2">
+          <a:blip r:embed="rId3">
             <a:extLst>
               <a:ext uri="{28A0092B-C50C-407E-A947-70E740481C1C}">
                 <a14:useLocalDpi xmlns:a14="http://schemas.microsoft.com/office/drawing/2010/main" val="0"/>
@@ -9491,15 +11019,6 @@
               </a:prstClr>
             </a:outerShdw>
           </a:effectLst>
-          <a:extLst>
-            <a:ext uri="{909E8E84-426E-40DD-AFC4-6F175D3DCCD1}">
-              <a14:hiddenFill xmlns:a14="http://schemas.microsoft.com/office/drawing/2010/main">
-                <a:solidFill>
-                  <a:srgbClr val="FFFFFF"/>
-                </a:solidFill>
-              </a14:hiddenFill>
-            </a:ext>
-          </a:extLst>
         </p:spPr>
       </p:pic>
       <p:sp>
@@ -9786,7 +11305,7 @@
           <p:nvPr/>
         </p:nvPicPr>
         <p:blipFill>
-          <a:blip r:embed="rId2">
+          <a:blip r:embed="rId3">
             <a:extLst>
               <a:ext uri="{28A0092B-C50C-407E-A947-70E740481C1C}">
                 <a14:useLocalDpi xmlns:a14="http://schemas.microsoft.com/office/drawing/2010/main" val="0"/>
@@ -9818,15 +11337,6 @@
               </a:prstClr>
             </a:outerShdw>
           </a:effectLst>
-          <a:extLst>
-            <a:ext uri="{909E8E84-426E-40DD-AFC4-6F175D3DCCD1}">
-              <a14:hiddenFill xmlns:a14="http://schemas.microsoft.com/office/drawing/2010/main">
-                <a:solidFill>
-                  <a:srgbClr val="FFFFFF"/>
-                </a:solidFill>
-              </a14:hiddenFill>
-            </a:ext>
-          </a:extLst>
         </p:spPr>
       </p:pic>
       <p:sp>
@@ -10122,7 +11632,7 @@
               <a:rPr lang="en-US" sz="1600" dirty="0">
                 <a:latin typeface="Arial" panose="020B0604020202020204" pitchFamily="34" charset="0"/>
                 <a:cs typeface="Arial" panose="020B0604020202020204" pitchFamily="34" charset="0"/>
-                <a:hlinkClick r:id="rId2"/>
+                <a:hlinkClick r:id="rId3"/>
               </a:rPr>
               <a:t>http://localhost:5555/</a:t>
             </a:r>
@@ -10148,7 +11658,7 @@
           <p:nvPr/>
         </p:nvPicPr>
         <p:blipFill>
-          <a:blip r:embed="rId3">
+          <a:blip r:embed="rId4">
             <a:extLst>
               <a:ext uri="{28A0092B-C50C-407E-A947-70E740481C1C}">
                 <a14:useLocalDpi xmlns:a14="http://schemas.microsoft.com/office/drawing/2010/main" val="0"/>
@@ -10180,15 +11690,6 @@
               </a:prstClr>
             </a:outerShdw>
           </a:effectLst>
-          <a:extLst>
-            <a:ext uri="{909E8E84-426E-40DD-AFC4-6F175D3DCCD1}">
-              <a14:hiddenFill xmlns:a14="http://schemas.microsoft.com/office/drawing/2010/main">
-                <a:solidFill>
-                  <a:srgbClr val="FFFFFF"/>
-                </a:solidFill>
-              </a14:hiddenFill>
-            </a:ext>
-          </a:extLst>
         </p:spPr>
       </p:pic>
       <p:sp>
@@ -10704,7 +12205,7 @@
           <p:nvPr/>
         </p:nvPicPr>
         <p:blipFill rotWithShape="1">
-          <a:blip r:embed="rId2">
+          <a:blip r:embed="rId3">
             <a:extLst>
               <a:ext uri="{28A0092B-C50C-407E-A947-70E740481C1C}">
                 <a14:useLocalDpi xmlns:a14="http://schemas.microsoft.com/office/drawing/2010/main" val="0"/>
@@ -10736,15 +12237,6 @@
               </a:prstClr>
             </a:outerShdw>
           </a:effectLst>
-          <a:extLst>
-            <a:ext uri="{909E8E84-426E-40DD-AFC4-6F175D3DCCD1}">
-              <a14:hiddenFill xmlns:a14="http://schemas.microsoft.com/office/drawing/2010/main">
-                <a:solidFill>
-                  <a:srgbClr val="FFFFFF"/>
-                </a:solidFill>
-              </a14:hiddenFill>
-            </a:ext>
-          </a:extLst>
         </p:spPr>
       </p:pic>
       <p:sp>
@@ -11505,7 +12997,7 @@
           <p:nvPr/>
         </p:nvPicPr>
         <p:blipFill>
-          <a:blip r:embed="rId2"/>
+          <a:blip r:embed="rId3"/>
           <a:stretch>
             <a:fillRect/>
           </a:stretch>
@@ -11547,7 +13039,7 @@
           <p:nvPr/>
         </p:nvPicPr>
         <p:blipFill rotWithShape="1">
-          <a:blip r:embed="rId3">
+          <a:blip r:embed="rId4">
             <a:extLst>
               <a:ext uri="{28A0092B-C50C-407E-A947-70E740481C1C}">
                 <a14:useLocalDpi xmlns:a14="http://schemas.microsoft.com/office/drawing/2010/main" val="0"/>
@@ -11579,15 +13071,6 @@
               </a:prstClr>
             </a:outerShdw>
           </a:effectLst>
-          <a:extLst>
-            <a:ext uri="{909E8E84-426E-40DD-AFC4-6F175D3DCCD1}">
-              <a14:hiddenFill xmlns:a14="http://schemas.microsoft.com/office/drawing/2010/main">
-                <a:solidFill>
-                  <a:srgbClr val="FFFFFF"/>
-                </a:solidFill>
-              </a14:hiddenFill>
-            </a:ext>
-          </a:extLst>
         </p:spPr>
       </p:pic>
       <p:sp>
@@ -11674,12 +13157,8 @@
               <a:defRPr/>
             </a:pPr>
             <a:r>
-              <a:rPr lang="en-US" dirty="0"/>
-              <a:t>S</a:t>
-            </a:r>
-            <a:r>
               <a:rPr lang="en-US" b="1" dirty="0"/>
-              <a:t>imulate a real-world, end-to-end machine learning application</a:t>
+              <a:t>Simulate a real-world, end-to-end machine learning application</a:t>
             </a:r>
             <a:r>
               <a:rPr lang="en-US" dirty="0"/>
@@ -11756,6 +13235,111 @@
   <p:clrMapOvr>
     <a:masterClrMapping/>
   </p:clrMapOvr>
+  <p:timing>
+    <p:tnLst>
+      <p:par>
+        <p:cTn id="1" dur="indefinite" restart="never" nodeType="tmRoot">
+          <p:childTnLst>
+            <p:seq concurrent="1" nextAc="seek">
+              <p:cTn id="2" dur="indefinite" nodeType="mainSeq">
+                <p:childTnLst>
+                  <p:par>
+                    <p:cTn id="3" fill="hold">
+                      <p:stCondLst>
+                        <p:cond delay="indefinite"/>
+                      </p:stCondLst>
+                      <p:childTnLst>
+                        <p:par>
+                          <p:cTn id="4" fill="hold">
+                            <p:stCondLst>
+                              <p:cond delay="0"/>
+                            </p:stCondLst>
+                            <p:childTnLst>
+                              <p:par>
+                                <p:cTn id="5" presetID="1" presetClass="entr" presetSubtype="0" fill="hold" grpId="0" nodeType="clickEffect">
+                                  <p:stCondLst>
+                                    <p:cond delay="0"/>
+                                  </p:stCondLst>
+                                  <p:childTnLst>
+                                    <p:set>
+                                      <p:cBhvr>
+                                        <p:cTn id="6" dur="1" fill="hold">
+                                          <p:stCondLst>
+                                            <p:cond delay="0"/>
+                                          </p:stCondLst>
+                                        </p:cTn>
+                                        <p:tgtEl>
+                                          <p:spTgt spid="9"/>
+                                        </p:tgtEl>
+                                        <p:attrNameLst>
+                                          <p:attrName>style.visibility</p:attrName>
+                                        </p:attrNameLst>
+                                      </p:cBhvr>
+                                      <p:to>
+                                        <p:strVal val="visible"/>
+                                      </p:to>
+                                    </p:set>
+                                  </p:childTnLst>
+                                </p:cTn>
+                              </p:par>
+                              <p:par>
+                                <p:cTn id="7" presetID="1" presetClass="entr" presetSubtype="0" fill="hold" nodeType="withEffect">
+                                  <p:stCondLst>
+                                    <p:cond delay="0"/>
+                                  </p:stCondLst>
+                                  <p:childTnLst>
+                                    <p:set>
+                                      <p:cBhvr>
+                                        <p:cTn id="8" dur="1" fill="hold">
+                                          <p:stCondLst>
+                                            <p:cond delay="0"/>
+                                          </p:stCondLst>
+                                        </p:cTn>
+                                        <p:tgtEl>
+                                          <p:spTgt spid="1026"/>
+                                        </p:tgtEl>
+                                        <p:attrNameLst>
+                                          <p:attrName>style.visibility</p:attrName>
+                                        </p:attrNameLst>
+                                      </p:cBhvr>
+                                      <p:to>
+                                        <p:strVal val="visible"/>
+                                      </p:to>
+                                    </p:set>
+                                  </p:childTnLst>
+                                </p:cTn>
+                              </p:par>
+                            </p:childTnLst>
+                          </p:cTn>
+                        </p:par>
+                      </p:childTnLst>
+                    </p:cTn>
+                  </p:par>
+                </p:childTnLst>
+              </p:cTn>
+              <p:prevCondLst>
+                <p:cond evt="onPrev" delay="0">
+                  <p:tgtEl>
+                    <p:sldTgt/>
+                  </p:tgtEl>
+                </p:cond>
+              </p:prevCondLst>
+              <p:nextCondLst>
+                <p:cond evt="onNext" delay="0">
+                  <p:tgtEl>
+                    <p:sldTgt/>
+                  </p:tgtEl>
+                </p:cond>
+              </p:nextCondLst>
+            </p:seq>
+          </p:childTnLst>
+        </p:cTn>
+      </p:par>
+    </p:tnLst>
+    <p:bldLst>
+      <p:bldP spid="9" grpId="0" animBg="1"/>
+    </p:bldLst>
+  </p:timing>
 </p:sld>
 </file>
 
@@ -11796,7 +13380,7 @@
         </p:nvSpPr>
         <p:spPr>
           <a:xfrm>
-            <a:off x="852321" y="0"/>
+            <a:off x="1003751" y="186569"/>
             <a:ext cx="5605629" cy="994172"/>
           </a:xfrm>
         </p:spPr>
@@ -12239,7 +13823,7 @@
                 <a14:useLocalDpi xmlns:a14="http://schemas.microsoft.com/office/drawing/2010/main" val="0"/>
               </a:ext>
               <a:ext uri="{96DAC541-7B7A-43D3-8B79-37D633B846F1}">
-                <asvg:svgBlip xmlns:asvg="http://schemas.microsoft.com/office/drawing/2016/SVG/main" r:embed="rId2"/>
+                <asvg:svgBlip xmlns:asvg="http://schemas.microsoft.com/office/drawing/2016/SVG/main" r:embed="rId3"/>
               </a:ext>
             </a:extLst>
           </a:blip>
@@ -12555,7 +14139,7 @@
             </a:r>
             <a:r>
               <a:rPr lang="en-CA" sz="1500" dirty="0">
-                <a:hlinkClick r:id="rId2"/>
+                <a:hlinkClick r:id="rId3"/>
               </a:rPr>
               <a:t>http://localhost:5555</a:t>
             </a:r>
@@ -12611,7 +14195,7 @@
             </a:r>
             <a:r>
               <a:rPr lang="en-CA" sz="1500" dirty="0">
-                <a:hlinkClick r:id="rId3"/>
+                <a:hlinkClick r:id="rId4"/>
               </a:rPr>
               <a:t>http://localhost:8000/docs</a:t>
             </a:r>
@@ -12667,7 +14251,7 @@
             </a:r>
             <a:r>
               <a:rPr lang="en-CA" sz="1500" dirty="0">
-                <a:hlinkClick r:id="rId4"/>
+                <a:hlinkClick r:id="rId5"/>
               </a:rPr>
               <a:t>http://localhost:8501</a:t>
             </a:r>
@@ -12907,7 +14491,7 @@
                 <a14:useLocalDpi xmlns:a14="http://schemas.microsoft.com/office/drawing/2010/main" val="0"/>
               </a:ext>
               <a:ext uri="{96DAC541-7B7A-43D3-8B79-37D633B846F1}">
-                <asvg:svgBlip xmlns:asvg="http://schemas.microsoft.com/office/drawing/2016/SVG/main" r:embed="rId5"/>
+                <asvg:svgBlip xmlns:asvg="http://schemas.microsoft.com/office/drawing/2016/SVG/main" r:embed="rId6"/>
               </a:ext>
             </a:extLst>
           </a:blip>
@@ -13223,7 +14807,7 @@
           <p:nvPr/>
         </p:nvPicPr>
         <p:blipFill rotWithShape="1">
-          <a:blip r:embed="rId2">
+          <a:blip r:embed="rId3">
             <a:extLst>
               <a:ext uri="{28A0092B-C50C-407E-A947-70E740481C1C}">
                 <a14:useLocalDpi xmlns:a14="http://schemas.microsoft.com/office/drawing/2010/main" val="0"/>
@@ -13255,15 +14839,6 @@
               </a:prstClr>
             </a:outerShdw>
           </a:effectLst>
-          <a:extLst>
-            <a:ext uri="{909E8E84-426E-40DD-AFC4-6F175D3DCCD1}">
-              <a14:hiddenFill xmlns:a14="http://schemas.microsoft.com/office/drawing/2010/main">
-                <a:solidFill>
-                  <a:srgbClr val="FFFFFF"/>
-                </a:solidFill>
-              </a14:hiddenFill>
-            </a:ext>
-          </a:extLst>
         </p:spPr>
       </p:pic>
       <p:sp>
@@ -13863,7 +15438,7 @@
           <p:nvPr/>
         </p:nvPicPr>
         <p:blipFill rotWithShape="1">
-          <a:blip r:embed="rId2">
+          <a:blip r:embed="rId3">
             <a:extLst>
               <a:ext uri="{28A0092B-C50C-407E-A947-70E740481C1C}">
                 <a14:useLocalDpi xmlns:a14="http://schemas.microsoft.com/office/drawing/2010/main" val="0"/>
@@ -13895,15 +15470,6 @@
               </a:prstClr>
             </a:outerShdw>
           </a:effectLst>
-          <a:extLst>
-            <a:ext uri="{909E8E84-426E-40DD-AFC4-6F175D3DCCD1}">
-              <a14:hiddenFill xmlns:a14="http://schemas.microsoft.com/office/drawing/2010/main">
-                <a:solidFill>
-                  <a:srgbClr val="FFFFFF"/>
-                </a:solidFill>
-              </a14:hiddenFill>
-            </a:ext>
-          </a:extLst>
         </p:spPr>
       </p:pic>
       <p:sp>
@@ -14032,7 +15598,7 @@
           <p:nvPr/>
         </p:nvPicPr>
         <p:blipFill>
-          <a:blip r:embed="rId2"/>
+          <a:blip r:embed="rId3"/>
           <a:srcRect/>
           <a:stretch>
             <a:fillRect/>
@@ -14450,7 +16016,7 @@
                 </a:solidFill>
                 <a:effectLst/>
                 <a:latin typeface="Arial" panose="020B0604020202020204" pitchFamily="34" charset="0"/>
-                <a:hlinkClick r:id="rId2"/>
+                <a:hlinkClick r:id="rId3"/>
               </a:rPr>
               <a:t>UCI repository</a:t>
             </a:r>
@@ -14758,7 +16324,7 @@
                 </a:solidFill>
                 <a:effectLst/>
                 <a:latin typeface="Arial" panose="020B0604020202020204" pitchFamily="34" charset="0"/>
-                <a:hlinkClick r:id="rId3"/>
+                <a:hlinkClick r:id="rId4"/>
               </a:rPr>
               <a:t>Tsanas</a:t>
             </a:r>
@@ -14772,7 +16338,7 @@
                 </a:solidFill>
                 <a:effectLst/>
                 <a:latin typeface="Arial" panose="020B0604020202020204" pitchFamily="34" charset="0"/>
-                <a:hlinkClick r:id="rId3"/>
+                <a:hlinkClick r:id="rId4"/>
               </a:rPr>
               <a:t> &amp; </a:t>
             </a:r>
@@ -14786,7 +16352,7 @@
                 </a:solidFill>
                 <a:effectLst/>
                 <a:latin typeface="Arial" panose="020B0604020202020204" pitchFamily="34" charset="0"/>
-                <a:hlinkClick r:id="rId3"/>
+                <a:hlinkClick r:id="rId4"/>
               </a:rPr>
               <a:t>Xifara</a:t>
             </a:r>
@@ -14800,7 +16366,7 @@
                 </a:solidFill>
                 <a:effectLst/>
                 <a:latin typeface="Arial" panose="020B0604020202020204" pitchFamily="34" charset="0"/>
-                <a:hlinkClick r:id="rId3"/>
+                <a:hlinkClick r:id="rId4"/>
               </a:rPr>
               <a:t> (2012), </a:t>
             </a:r>
@@ -14814,7 +16380,7 @@
                 </a:solidFill>
                 <a:effectLst/>
                 <a:latin typeface="Arial" panose="020B0604020202020204" pitchFamily="34" charset="0"/>
-                <a:hlinkClick r:id="rId3"/>
+                <a:hlinkClick r:id="rId4"/>
               </a:rPr>
               <a:t>Energy and Buildings</a:t>
             </a:r>
@@ -14828,7 +16394,7 @@
                 </a:solidFill>
                 <a:effectLst/>
                 <a:latin typeface="Arial" panose="020B0604020202020204" pitchFamily="34" charset="0"/>
-                <a:hlinkClick r:id="rId3"/>
+                <a:hlinkClick r:id="rId4"/>
               </a:rPr>
               <a:t> </a:t>
             </a:r>
@@ -14860,7 +16426,7 @@
           <p:nvPr/>
         </p:nvPicPr>
         <p:blipFill rotWithShape="1">
-          <a:blip r:embed="rId4">
+          <a:blip r:embed="rId5">
             <a:extLst>
               <a:ext uri="{28A0092B-C50C-407E-A947-70E740481C1C}">
                 <a14:useLocalDpi xmlns:a14="http://schemas.microsoft.com/office/drawing/2010/main" val="0"/>
@@ -14892,15 +16458,6 @@
               </a:prstClr>
             </a:outerShdw>
           </a:effectLst>
-          <a:extLst>
-            <a:ext uri="{909E8E84-426E-40DD-AFC4-6F175D3DCCD1}">
-              <a14:hiddenFill xmlns:a14="http://schemas.microsoft.com/office/drawing/2010/main">
-                <a:solidFill>
-                  <a:srgbClr val="FFFFFF"/>
-                </a:solidFill>
-              </a14:hiddenFill>
-            </a:ext>
-          </a:extLst>
         </p:spPr>
       </p:pic>
       <p:sp>
@@ -15190,7 +16747,7 @@
           <p:nvPr/>
         </p:nvPicPr>
         <p:blipFill>
-          <a:blip r:embed="rId2">
+          <a:blip r:embed="rId3">
             <a:extLst>
               <a:ext uri="{28A0092B-C50C-407E-A947-70E740481C1C}">
                 <a14:useLocalDpi xmlns:a14="http://schemas.microsoft.com/office/drawing/2010/main" val="0"/>
@@ -15222,15 +16779,6 @@
               </a:prstClr>
             </a:outerShdw>
           </a:effectLst>
-          <a:extLst>
-            <a:ext uri="{909E8E84-426E-40DD-AFC4-6F175D3DCCD1}">
-              <a14:hiddenFill xmlns:a14="http://schemas.microsoft.com/office/drawing/2010/main">
-                <a:solidFill>
-                  <a:srgbClr val="FFFFFF"/>
-                </a:solidFill>
-              </a14:hiddenFill>
-            </a:ext>
-          </a:extLst>
         </p:spPr>
       </p:pic>
       <p:sp>
